--- a/steptember-showdown.pptx
+++ b/steptember-showdown.pptx
@@ -6,9 +6,10 @@
   </p:sldMasterIdLst>
   <p:sldIdLst>
     <p:sldId id="256" r:id="rId2"/>
+    <p:sldId id="257" r:id="rId3"/>
   </p:sldIdLst>
   <p:notesMasterIdLst>
-    <p:notesMasterId r:id="rId3"/>
+    <p:notesMasterId r:id="rId4"/>
   </p:notesMasterIdLst>
   <p:sldSz cx="12192000" cy="6858000"/>
   <p:notesSz cx="6858000" cy="12192000"/>
@@ -104,20 +105,6 @@
       </a:defRPr>
     </a:lvl9pPr>
   </p:defaultTextStyle>
-  <p:extLst>
-    <p:ext uri="{521415D9-36F7-43E2-AB2F-B90AF26B5E84}">
-      <p14:sectionLst xmlns:p14="http://schemas.microsoft.com/office/powerpoint/2010/main">
-        <p14:section name="Results" id="{dae83427-fa7d-9207-2c56-804cd48c85ee}">
-          <p14:sldIdLst>
-            <p14:sldId id="256"/>
-          </p14:sldIdLst>
-        </p14:section>
-      </p14:sectionLst>
-    </p:ext>
-    <p:ext uri="{EFAFB233-063F-42B5-8137-9DF3F51BA10A}">
-      <p15:sldGuideLst xmlns:p15="http://schemas.microsoft.com/office/powerpoint/2012/main"/>
-    </p:ext>
-  </p:extLst>
 </p:presentation>
 </file>
 
@@ -142,7 +129,7 @@
               <c:strCache>
                 <c:ptCount val="1"/>
                 <c:pt idx="0">
-                  <c:v>Most steps</c:v>
+                  <c:v>Steps</c:v>
                 </c:pt>
               </c:strCache>
             </c:strRef>
@@ -155,23 +142,24 @@
           </c:spPr>
           <c:invertIfNegative val="0"/>
           <c:dLbls>
-            <c:numFmt formatCode="#,##0,&quot;k&quot;" sourceLinked="0"/>
+            <c:numFmt formatCode="#,##0" sourceLinked="0"/>
             <c:txPr>
               <a:bodyPr/>
               <a:lstStyle/>
               <a:p>
                 <a:pPr>
-                  <a:defRPr b="1" i="0" strike="noStrike" sz="1200" u="none">
+                  <a:defRPr b="1" i="0" strike="noStrike" sz="1100" u="none">
                     <a:solidFill>
                       <a:srgbClr val="101014"/>
                     </a:solidFill>
-                    <a:latin typeface="+mn-lt"/>
+                    <a:latin typeface="Calibri"/>
                   </a:defRPr>
                 </a:pPr>
               </a:p>
             </c:txPr>
+            <c:dLblPos val="inEnd"/>
             <c:showLegendKey val="0"/>
-            <c:showVal val="1"/>
+            <c:showVal val="0"/>
             <c:showCatName val="0"/>
             <c:showSerName val="0"/>
             <c:showPercent val="0"/>
@@ -218,13 +206,13 @@
                 <c:ptCount val="3"/>
                 <c:lvl>
                   <c:pt idx="0">
-                    <c:v>Escalated to the Stepping Committee</c:v>
+                    <c:v>Escalated to the Stepping Committee  2,010,568</c:v>
                   </c:pt>
                   <c:pt idx="1">
-                    <c:v>Finding Our Footing</c:v>
+                    <c:v>Finding Our Footing  1,752,951</c:v>
                   </c:pt>
                   <c:pt idx="2">
-                    <c:v>Walkoholics</c:v>
+                    <c:v>Walkoholics  1,621,952</c:v>
                   </c:pt>
                 </c:lvl>
               </c:multiLvlStrCache>
@@ -250,23 +238,24 @@
           </c:val>
         </c:ser>
         <c:dLbls>
-          <c:numFmt formatCode="#,##0,&quot;k&quot;" sourceLinked="0"/>
+          <c:numFmt formatCode="#,##0" sourceLinked="0"/>
           <c:txPr>
             <a:bodyPr/>
             <a:lstStyle/>
             <a:p>
               <a:pPr>
-                <a:defRPr b="1" i="0" strike="noStrike" sz="1200" u="none">
+                <a:defRPr b="1" i="0" strike="noStrike" sz="1100" u="none">
                   <a:solidFill>
                     <a:srgbClr val="101014"/>
                   </a:solidFill>
-                  <a:latin typeface="+mn-lt"/>
+                  <a:latin typeface="Calibri"/>
                 </a:defRPr>
               </a:pPr>
             </a:p>
           </c:txPr>
+          <c:dLblPos val="inEnd"/>
           <c:showLegendKey val="0"/>
-          <c:showVal val="1"/>
+          <c:showVal val="0"/>
           <c:showCatName val="0"/>
           <c:showSerName val="0"/>
           <c:showPercent val="0"/>
@@ -304,11 +293,11 @@
           <a:lstStyle/>
           <a:p>
             <a:pPr>
-              <a:defRPr sz="1200" b="0" i="0" u="none" strike="noStrike">
+              <a:defRPr sz="1100" b="0" i="0" u="none" strike="noStrike">
                 <a:solidFill>
                   <a:srgbClr val="101014"/>
                 </a:solidFill>
-                <a:latin typeface="+mn-lt"/>
+                <a:latin typeface="Calibri"/>
               </a:defRPr>
             </a:pPr>
             <a:endParaRPr lang="en-US"/>
@@ -324,271 +313,7 @@
         <c:axId val="2094734552"/>
         <c:scaling>
           <c:orientation val="minMax"/>
-          <c:max val="3116380.4"/>
-          <c:min val="0"/>
-        </c:scaling>
-        <c:delete val="1"/>
-        <c:axPos val="b"/>
-        <c:numFmt formatCode="General" sourceLinked="0"/>
-        <c:majorTickMark val="out"/>
-        <c:minorTickMark val="none"/>
-        <c:tickLblPos val="low"/>
-        <c:spPr>
-          <a:ln w="12700" cap="flat">
-            <a:solidFill>
-              <a:srgbClr val="888888"/>
-            </a:solidFill>
-            <a:prstDash val="solid"/>
-            <a:round/>
-          </a:ln>
-        </c:spPr>
-        <c:txPr>
-          <a:bodyPr/>
-          <a:lstStyle/>
-          <a:p>
-            <a:pPr>
-              <a:defRPr sz="1200" b="0" i="0" u="none" strike="noStrike">
-                <a:solidFill>
-                  <a:srgbClr val="000000"/>
-                </a:solidFill>
-                <a:latin typeface="Arial"/>
-              </a:defRPr>
-            </a:pPr>
-            <a:endParaRPr lang="en-US"/>
-          </a:p>
-        </c:txPr>
-        <c:crossAx val="2094734554"/>
-        <c:crosses val="autoZero"/>
-        <c:crossBetween val="between"/>
-      </c:valAx>
-      <c:spPr>
-        <a:noFill/>
-        <a:ln>
-          <a:noFill/>
-        </a:ln>
-        <a:effectLst/>
-      </c:spPr>
-    </c:plotArea>
-    <c:plotVisOnly val="1"/>
-    <c:dispBlanksAs val="span"/>
-  </c:chart>
-  <c:spPr>
-    <a:noFill/>
-    <a:ln>
-      <a:noFill/>
-    </a:ln>
-    <a:effectLst/>
-  </c:spPr>
-  <c:externalData r:id="rId1">
-    <c:autoUpdate val="0"/>
-  </c:externalData>
-</c:chartSpace>
-</file>
-
-<file path=ppt/charts/chart2.xml><?xml version="1.0" encoding="utf-8"?>
-<c:chartSpace xmlns:c="http://schemas.openxmlformats.org/drawingml/2006/chart" xmlns:a="http://schemas.openxmlformats.org/drawingml/2006/main" xmlns:r="http://schemas.openxmlformats.org/officeDocument/2006/relationships">
-  <c:date1904 val="0"/>
-  <c:roundedCorners val="1"/>
-  <c:chart>
-    <c:autoTitleDeleted val="1"/>
-    <c:plotArea>
-      <c:layout/>
-      <c:barChart>
-        <c:barDir val="bar"/>
-        <c:grouping val="clustered"/>
-        <c:varyColors val="0"/>
-        <c:ser>
-          <c:idx val="0"/>
-          <c:order val="0"/>
-          <c:tx>
-            <c:strRef>
-              <c:f>Sheet1!$B$1</c:f>
-              <c:strCache>
-                <c:ptCount val="1"/>
-                <c:pt idx="0">
-                  <c:v>Most raised</c:v>
-                </c:pt>
-              </c:strCache>
-            </c:strRef>
-          </c:tx>
-          <c:spPr>
-            <a:solidFill>
-              <a:srgbClr val="EB6834"/>
-            </a:solidFill>
-            <a:effectLst/>
-          </c:spPr>
-          <c:invertIfNegative val="0"/>
-          <c:dLbls>
-            <c:numFmt formatCode="$#,##0" sourceLinked="0"/>
-            <c:txPr>
-              <a:bodyPr/>
-              <a:lstStyle/>
-              <a:p>
-                <a:pPr>
-                  <a:defRPr b="1" i="0" strike="noStrike" sz="1200" u="none">
-                    <a:solidFill>
-                      <a:srgbClr val="101014"/>
-                    </a:solidFill>
-                    <a:latin typeface="+mn-lt"/>
-                  </a:defRPr>
-                </a:pPr>
-              </a:p>
-            </c:txPr>
-            <c:showLegendKey val="0"/>
-            <c:showVal val="1"/>
-            <c:showCatName val="0"/>
-            <c:showSerName val="0"/>
-            <c:showPercent val="0"/>
-            <c:showBubbleSize val="0"/>
-            <c:showLeaderLines val="0"/>
-          </c:dLbls>
-          <c:dPt>
-            <c:idx val="0"/>
-            <c:invertIfNegative val="0"/>
-            <c:bubble3D val="0"/>
-            <c:spPr>
-              <a:solidFill>
-                <a:srgbClr val="EB6834"/>
-              </a:solidFill>
-              <a:effectLst/>
-            </c:spPr>
-          </c:dPt>
-          <c:dPt>
-            <c:idx val="1"/>
-            <c:invertIfNegative val="0"/>
-            <c:bubble3D val="0"/>
-            <c:spPr>
-              <a:solidFill>
-                <a:srgbClr val="1BAF7A"/>
-              </a:solidFill>
-              <a:effectLst/>
-            </c:spPr>
-          </c:dPt>
-          <c:dPt>
-            <c:idx val="2"/>
-            <c:invertIfNegative val="0"/>
-            <c:bubble3D val="0"/>
-            <c:spPr>
-              <a:solidFill>
-                <a:srgbClr val="2A78D6"/>
-              </a:solidFill>
-              <a:effectLst/>
-            </c:spPr>
-          </c:dPt>
-          <c:cat>
-            <c:multiLvlStrRef>
-              <c:f>Sheet1!$A$2:$A$4</c:f>
-              <c:multiLvlStrCache>
-                <c:ptCount val="3"/>
-                <c:lvl>
-                  <c:pt idx="0">
-                    <c:v>Finding Our Footing</c:v>
-                  </c:pt>
-                  <c:pt idx="1">
-                    <c:v>Escalated to the Stepping Committee</c:v>
-                  </c:pt>
-                  <c:pt idx="2">
-                    <c:v>Walkoholics</c:v>
-                  </c:pt>
-                </c:lvl>
-              </c:multiLvlStrCache>
-            </c:multiLvlStrRef>
-          </c:cat>
-          <c:val>
-            <c:numRef>
-              <c:f>Sheet1!$B$2:$B$4</c:f>
-              <c:numCache>
-                <c:formatCode>General</c:formatCode>
-                <c:ptCount val="3"/>
-                <c:pt idx="0">
-                  <c:v>866</c:v>
-                </c:pt>
-                <c:pt idx="1">
-                  <c:v>470</c:v>
-                </c:pt>
-                <c:pt idx="2">
-                  <c:v>154</c:v>
-                </c:pt>
-              </c:numCache>
-            </c:numRef>
-          </c:val>
-        </c:ser>
-        <c:dLbls>
-          <c:numFmt formatCode="$#,##0" sourceLinked="0"/>
-          <c:txPr>
-            <a:bodyPr/>
-            <a:lstStyle/>
-            <a:p>
-              <a:pPr>
-                <a:defRPr b="1" i="0" strike="noStrike" sz="1200" u="none">
-                  <a:solidFill>
-                    <a:srgbClr val="101014"/>
-                  </a:solidFill>
-                  <a:latin typeface="+mn-lt"/>
-                </a:defRPr>
-              </a:pPr>
-            </a:p>
-          </c:txPr>
-          <c:showLegendKey val="0"/>
-          <c:showVal val="1"/>
-          <c:showCatName val="0"/>
-          <c:showSerName val="0"/>
-          <c:showPercent val="0"/>
-          <c:showBubbleSize val="0"/>
-          <c:showLeaderLines val="0"/>
-        </c:dLbls>
-        <c:gapWidth val="40"/>
-        <c:overlap val="0"/>
-        <c:axId val="2094734554"/>
-        <c:axId val="2094734552"/>
-        <c:axId val="2094734556"/>
-      </c:barChart>
-      <c:catAx>
-        <c:axId val="2094734554"/>
-        <c:scaling>
-          <c:orientation val="maxMin"/>
-        </c:scaling>
-        <c:delete val="0"/>
-        <c:axPos val="l"/>
-        <c:numFmt formatCode="General" sourceLinked="1"/>
-        <c:majorTickMark val="out"/>
-        <c:minorTickMark val="none"/>
-        <c:tickLblPos val="nextTo"/>
-        <c:spPr>
-          <a:ln w="12700" cap="flat">
-            <a:solidFill>
-              <a:srgbClr val="888888"/>
-            </a:solidFill>
-            <a:prstDash val="solid"/>
-            <a:round/>
-          </a:ln>
-        </c:spPr>
-        <c:txPr>
-          <a:bodyPr/>
-          <a:lstStyle/>
-          <a:p>
-            <a:pPr>
-              <a:defRPr sz="1200" b="0" i="0" u="none" strike="noStrike">
-                <a:solidFill>
-                  <a:srgbClr val="101014"/>
-                </a:solidFill>
-                <a:latin typeface="+mn-lt"/>
-              </a:defRPr>
-            </a:pPr>
-            <a:endParaRPr lang="en-US"/>
-          </a:p>
-        </c:txPr>
-        <c:crossAx val="2094734552"/>
-        <c:crosses val="autoZero"/>
-        <c:auto val="1"/>
-        <c:lblAlgn val="ctr"/>
-        <c:noMultiLvlLbl val="1"/>
-      </c:catAx>
-      <c:valAx>
-        <c:axId val="2094734552"/>
-        <c:scaling>
-          <c:orientation val="minMax"/>
-          <c:max val="1342.3"/>
+          <c:max val="2010568"/>
           <c:min val="0"/>
         </c:scaling>
         <c:delete val="1"/>
@@ -1044,7 +769,7 @@
           <a:p>
             <a:r>
               <a:rPr lang="en-US" dirty="0"/>
-              <a:t>Figures as at 11 Oct 2026. Team money uses each team's Steptember page; individual figures are personal pages and may not sum exactly. Escalated to the Stepping Committee won steps; Finding Our Footing raised the most.</a:t>
+              <a:t>Slide 1: the challenge, why we did it, and the three subteams.</a:t>
             </a:r>
             <a:endParaRPr lang="en-US" dirty="0"/>
           </a:p>
@@ -1068,6 +793,94 @@
             <a:fld id="{F7021451-1387-4CA6-816F-3879F97B5CBC}" type="slidenum">
               <a:rPr lang="en-US"/>
               <a:t>1</a:t>
+            </a:fld>
+            <a:endParaRPr lang="en-US"/>
+          </a:p>
+        </p:txBody>
+      </p:sp>
+    </p:spTree>
+    <p:extLst>
+      <p:ext uri="{BB962C8B-B14F-4D97-AF65-F5344CB8AC3E}">
+        <p14:creationId xmlns:p14="http://schemas.microsoft.com/office/powerpoint/2010/main" val="1024086991"/>
+      </p:ext>
+    </p:extLst>
+  </p:cSld>
+  <p:clrMapOvr>
+    <a:masterClrMapping/>
+  </p:clrMapOvr>
+</p:notes>
+</file>
+
+<file path=ppt/notesSlides/notesSlide2.xml><?xml version="1.0" encoding="utf-8"?>
+<p:notes xmlns:a="http://schemas.openxmlformats.org/drawingml/2006/main" xmlns:r="http://schemas.openxmlformats.org/officeDocument/2006/relationships" xmlns:p="http://schemas.openxmlformats.org/presentationml/2006/main">
+  <p:cSld>
+    <p:spTree>
+      <p:nvGrpSpPr>
+        <p:cNvPr id="1" name=""/>
+        <p:cNvGrpSpPr/>
+        <p:nvPr/>
+      </p:nvGrpSpPr>
+      <p:grpSpPr>
+        <a:xfrm>
+          <a:off x="0" y="0"/>
+          <a:ext cx="0" cy="0"/>
+          <a:chOff x="0" y="0"/>
+          <a:chExt cx="0" cy="0"/>
+        </a:xfrm>
+      </p:grpSpPr>
+      <p:sp>
+        <p:nvSpPr>
+          <p:cNvPr id="2" name="Slide Image Placeholder 1"/>
+          <p:cNvSpPr>
+            <a:spLocks noGrp="1" noRot="1" noChangeAspect="1"/>
+          </p:cNvSpPr>
+          <p:nvPr>
+            <p:ph type="sldImg"/>
+          </p:nvPr>
+        </p:nvSpPr>
+        <p:spPr/>
+      </p:sp>
+      <p:sp>
+        <p:nvSpPr>
+          <p:cNvPr id="3" name="Notes Placeholder 2"/>
+          <p:cNvSpPr>
+            <a:spLocks noGrp="1"/>
+          </p:cNvSpPr>
+          <p:nvPr>
+            <p:ph type="body" idx="1"/>
+          </p:nvPr>
+        </p:nvSpPr>
+        <p:spPr/>
+        <p:txBody>
+          <a:bodyPr/>
+          <a:lstStyle/>
+          <a:p>
+            <a:r>
+              <a:rPr lang="en-US" dirty="0"/>
+              <a:t>Figures are a snapshot as at 11 October 2026 from data/teams.json. Team money comes from each team's Steptember page, so it may not equal the sum of individual amounts.</a:t>
+            </a:r>
+            <a:endParaRPr lang="en-US" dirty="0"/>
+          </a:p>
+        </p:txBody>
+      </p:sp>
+      <p:sp>
+        <p:nvSpPr>
+          <p:cNvPr id="4" name="Slide Number Placeholder 3"/>
+          <p:cNvSpPr>
+            <a:spLocks noGrp="1"/>
+          </p:cNvSpPr>
+          <p:nvPr>
+            <p:ph type="sldNum" sz="quarter" idx="10"/>
+          </p:nvPr>
+        </p:nvSpPr>
+        <p:spPr/>
+        <p:txBody>
+          <a:bodyPr/>
+          <a:lstStyle/>
+          <a:p>
+            <a:fld id="{F7021451-1387-4CA6-816F-3879F97B5CBC}" type="slidenum">
+              <a:rPr lang="en-US"/>
+              <a:t>2</a:t>
             </a:fld>
             <a:endParaRPr lang="en-US"/>
           </a:p>
@@ -1116,77 +929,6 @@
 </p:sldLayout>
 </file>
 
-<file path=ppt/slideLayouts/slideLayout2.xml><?xml version="1.0" encoding="utf-8"?>
-<p:sldLayout xmlns:a="http://schemas.openxmlformats.org/drawingml/2006/main" xmlns:r="http://schemas.openxmlformats.org/officeDocument/2006/relationships" xmlns:p="http://schemas.openxmlformats.org/presentationml/2006/main" preserve="1">
-  <p:cSld name="SHOWDOWN">
-    <p:bg>
-      <p:bgPr>
-        <a:solidFill>
-          <a:srgbClr val="2B2170"/>
-        </a:solidFill>
-      </p:bgPr>
-    </p:bg>
-    <p:spTree>
-      <p:nvGrpSpPr>
-        <p:cNvPr id="1" name=""/>
-        <p:cNvGrpSpPr/>
-        <p:nvPr/>
-      </p:nvGrpSpPr>
-      <p:grpSpPr>
-        <a:xfrm>
-          <a:off x="0" y="0"/>
-          <a:ext cx="0" cy="0"/>
-          <a:chOff x="0" y="0"/>
-          <a:chExt cx="0" cy="0"/>
-        </a:xfrm>
-      </p:grpSpPr>
-      <p:sp>
-        <p:nvSpPr>
-          <p:cNvPr id="2" name="Text 0"/>
-          <p:cNvSpPr/>
-          <p:nvPr>
-            <p:ph idx="100" type="title" hasCustomPrompt="1"/>
-          </p:nvPr>
-        </p:nvSpPr>
-        <p:spPr>
-          <a:xfrm>
-            <a:off x="548640" y="320040"/>
-            <a:ext cx="8686800" cy="731520"/>
-          </a:xfrm>
-          <a:prstGeom prst="rect">
-            <a:avLst/>
-          </a:prstGeom>
-          <a:noFill/>
-          <a:ln/>
-        </p:spPr>
-        <p:txBody>
-          <a:bodyPr wrap="square" rtlCol="0"/>
-          <a:lstStyle>
-            <a:lvl1pPr algn="l" indent="0" marL="0">
-              <a:buNone/>
-              <a:defRPr lang="en-US" sz="4000" b="1" dirty="0">
-                <a:solidFill>
-                  <a:schemeClr val="bg1"/>
-                </a:solidFill>
-              </a:defRPr>
-            </a:lvl1pPr>
-          </a:lstStyle>
-          <a:p>
-            <a:pPr algn="l" indent="0" marL="0">
-              <a:buNone/>
-            </a:pPr>
-            <a:endParaRPr lang="en-US" sz="4000" dirty="0"/>
-          </a:p>
-        </p:txBody>
-      </p:sp>
-    </p:spTree>
-  </p:cSld>
-  <p:clrMapOvr>
-    <a:masterClrMapping/>
-  </p:clrMapOvr>
-</p:sldLayout>
-</file>
-
 <file path=ppt/slideMasters/slideMaster1.xml><?xml version="1.0" encoding="utf-8"?>
 <p:sldMaster xmlns:a="http://schemas.openxmlformats.org/drawingml/2006/main" xmlns:r="http://schemas.openxmlformats.org/officeDocument/2006/relationships" xmlns:p="http://schemas.openxmlformats.org/presentationml/2006/main">
   <p:cSld>
@@ -1209,7 +951,6 @@
   <p:clrMap bg1="lt1" tx1="dk1" bg2="lt2" tx2="dk2" accent1="accent1" accent2="accent2" accent3="accent3" accent4="accent4" accent5="accent5" accent6="accent6" hlink="hlink" folHlink="folHlink"/>
   <p:sldLayoutIdLst>
     <p:sldLayoutId id="2147483649" r:id="rId1"/>
-    <p:sldLayoutId id="2147483650" r:id="rId2"/>
   </p:sldLayoutIdLst>
   <p:hf sldNum="0" hdr="0" ftr="0" dt="0"/>
   <p:txStyles>
@@ -1468,6 +1209,13 @@
 <file path=ppt/slides/slide1.xml><?xml version="1.0" encoding="utf-8"?>
 <p:sld xmlns:a="http://schemas.openxmlformats.org/drawingml/2006/main" xmlns:r="http://schemas.openxmlformats.org/officeDocument/2006/relationships" xmlns:p="http://schemas.openxmlformats.org/presentationml/2006/main">
   <p:cSld name="Slide 1">
+    <p:bg>
+      <p:bgPr>
+        <a:solidFill>
+          <a:srgbClr val="FFFFFF"/>
+        </a:solidFill>
+      </p:bgPr>
+    </p:bg>
     <p:spTree>
       <p:nvGrpSpPr>
         <p:cNvPr id="1" name=""/>
@@ -1484,100 +1232,102 @@
       </p:grpSpPr>
       <p:sp>
         <p:nvSpPr>
-          <p:cNvPr id="2" name="Text 0"/>
+          <p:cNvPr id="2" name="Title"/>
+          <p:cNvSpPr txBox="1"/>
+          <p:nvPr/>
+        </p:nvSpPr>
+        <p:spPr>
+          <a:xfrm>
+            <a:off x="548640" y="320040"/>
+            <a:ext cx="11064240" cy="731520"/>
+          </a:xfrm>
+          <a:prstGeom prst="rect">
+            <a:avLst/>
+          </a:prstGeom>
+          <a:noFill/>
+          <a:ln/>
+        </p:spPr>
+        <p:txBody>
+          <a:bodyPr wrap="square" lIns="0" tIns="0" rIns="0" bIns="0" rtlCol="0" anchor="ctr"/>
+          <a:lstStyle/>
+          <a:p>
+            <a:pPr indent="0" marL="0">
+              <a:buNone/>
+            </a:pPr>
+            <a:r>
+              <a:rPr lang="en-US" sz="4000" b="1" dirty="0">
+                <a:solidFill>
+                  <a:srgbClr val="101014"/>
+                </a:solidFill>
+                <a:latin typeface="Arial" pitchFamily="34" charset="0"/>
+                <a:ea typeface="Arial" pitchFamily="34" charset="-122"/>
+                <a:cs typeface="Arial" pitchFamily="34" charset="-120"/>
+              </a:rPr>
+              <a:t>TDC Canberra – Steptember Challenge</a:t>
+            </a:r>
+            <a:endParaRPr lang="en-US" sz="4000" dirty="0"/>
+          </a:p>
+        </p:txBody>
+      </p:sp>
+      <p:sp>
+        <p:nvSpPr>
+          <p:cNvPr id="3" name="Subtitle"/>
+          <p:cNvSpPr txBox="1"/>
+          <p:nvPr/>
+        </p:nvSpPr>
+        <p:spPr>
+          <a:xfrm>
+            <a:off x="548640" y="1005840"/>
+            <a:ext cx="11064240" cy="320040"/>
+          </a:xfrm>
+          <a:prstGeom prst="rect">
+            <a:avLst/>
+          </a:prstGeom>
+          <a:noFill/>
+          <a:ln/>
+        </p:spPr>
+        <p:txBody>
+          <a:bodyPr wrap="square" lIns="0" tIns="0" rIns="0" bIns="0" rtlCol="0" anchor="ctr"/>
+          <a:lstStyle/>
+          <a:p>
+            <a:pPr indent="0" marL="0">
+              <a:buNone/>
+            </a:pPr>
+            <a:r>
+              <a:rPr lang="en-US" sz="1600" dirty="0">
+                <a:solidFill>
+                  <a:srgbClr val="55545F"/>
+                </a:solidFill>
+                <a:latin typeface="Calibri" pitchFamily="34" charset="0"/>
+                <a:ea typeface="Calibri" pitchFamily="34" charset="-122"/>
+                <a:cs typeface="Calibri" pitchFamily="34" charset="-120"/>
+              </a:rPr>
+              <a:t>Raising money for the Cerebral Palsy Alliance  ·  September 2026</a:t>
+            </a:r>
+            <a:endParaRPr lang="en-US" sz="1600" dirty="0"/>
+          </a:p>
+        </p:txBody>
+      </p:sp>
+      <p:sp>
+        <p:nvSpPr>
+          <p:cNvPr id="4" name="Navy band"/>
           <p:cNvSpPr/>
-          <p:nvPr>
-            <p:ph idx="100" type="title" hasCustomPrompt="1"/>
-          </p:nvPr>
-        </p:nvSpPr>
-        <p:spPr>
-          <a:xfrm>
-            <a:off x="548640" y="320040"/>
-            <a:ext cx="8686800" cy="731520"/>
-          </a:xfrm>
-          <a:prstGeom prst="rect">
-            <a:avLst/>
-          </a:prstGeom>
-          <a:noFill/>
-          <a:ln/>
-        </p:spPr>
-        <p:txBody>
-          <a:bodyPr wrap="square" lIns="0" tIns="0" rIns="0" bIns="0" rtlCol="0" anchor="ctr"/>
-          <a:lstStyle/>
-          <a:p>
-            <a:pPr algn="l" indent="0" marL="0">
-              <a:buNone/>
-            </a:pPr>
-            <a:r>
-              <a:rPr lang="en-US" sz="4000" b="1" dirty="0">
-                <a:solidFill>
-                  <a:schemeClr val="bg1"/>
-                </a:solidFill>
-              </a:rPr>
-              <a:t>TDC Steptember Showdown</a:t>
-            </a:r>
-            <a:endParaRPr lang="en-US" sz="4000" dirty="0"/>
-          </a:p>
-        </p:txBody>
-      </p:sp>
-      <p:sp>
-        <p:nvSpPr>
-          <p:cNvPr id="3" name="Text 1"/>
-          <p:cNvSpPr txBox="1"/>
-          <p:nvPr/>
-        </p:nvSpPr>
-        <p:spPr>
-          <a:xfrm>
-            <a:off x="548640" y="1051560"/>
-            <a:ext cx="8229600" cy="365760"/>
-          </a:xfrm>
-          <a:prstGeom prst="rect">
-            <a:avLst/>
-          </a:prstGeom>
-          <a:noFill/>
-          <a:ln/>
-        </p:spPr>
-        <p:txBody>
-          <a:bodyPr wrap="square" lIns="0" tIns="0" rIns="0" bIns="0" rtlCol="0" anchor="ctr"/>
-          <a:lstStyle/>
-          <a:p>
-            <a:pPr indent="0" marL="0">
-              <a:buNone/>
-            </a:pPr>
-            <a:r>
-              <a:rPr lang="en-US" sz="1600" dirty="0">
-                <a:solidFill>
-                  <a:schemeClr val="accent6"/>
-                </a:solidFill>
-              </a:rPr>
-              <a:t>Raising money for the Cerebral Palsy Alliance  ·  September 2026</a:t>
-            </a:r>
-            <a:endParaRPr lang="en-US" sz="1600" dirty="0"/>
-          </a:p>
-        </p:txBody>
-      </p:sp>
-      <p:sp>
-        <p:nvSpPr>
-          <p:cNvPr id="4" name="Stat card 1"/>
-          <p:cNvSpPr/>
-          <p:nvPr/>
-        </p:nvSpPr>
-        <p:spPr>
-          <a:xfrm>
-            <a:off x="548640" y="1600200"/>
-            <a:ext cx="2651760" cy="1143000"/>
-          </a:xfrm>
-          <a:prstGeom prst="roundRect">
-            <a:avLst>
-              <a:gd name="adj" fmla="val 14400"/>
-            </a:avLst>
-          </a:prstGeom>
-          <a:solidFill>
-            <a:srgbClr val="3D31A0"/>
+          <p:nvPr/>
+        </p:nvSpPr>
+        <p:spPr>
+          <a:xfrm>
+            <a:off x="0" y="1600200"/>
+            <a:ext cx="12191695" cy="1828800"/>
+          </a:xfrm>
+          <a:prstGeom prst="rect">
+            <a:avLst/>
+          </a:prstGeom>
+          <a:solidFill>
+            <a:srgbClr val="2B2170"/>
           </a:solidFill>
           <a:ln w="12700">
             <a:solidFill>
-              <a:srgbClr val="3D31A0"/>
+              <a:srgbClr val="2B2170"/>
             </a:solidFill>
             <a:prstDash val="solid"/>
           </a:ln>
@@ -1585,98 +1335,26 @@
       </p:sp>
       <p:sp>
         <p:nvSpPr>
-          <p:cNvPr id="5" name="Text 3"/>
-          <p:cNvSpPr txBox="1"/>
-          <p:nvPr/>
-        </p:nvSpPr>
-        <p:spPr>
-          <a:xfrm>
-            <a:off x="731520" y="1664208"/>
-            <a:ext cx="2286000" cy="640080"/>
-          </a:xfrm>
-          <a:prstGeom prst="rect">
-            <a:avLst/>
-          </a:prstGeom>
-          <a:noFill/>
-          <a:ln/>
-        </p:spPr>
-        <p:txBody>
-          <a:bodyPr wrap="square" lIns="0" tIns="0" rIns="0" bIns="0" rtlCol="0" anchor="ctr"/>
-          <a:lstStyle/>
-          <a:p>
-            <a:pPr indent="0" marL="0">
-              <a:buNone/>
-            </a:pPr>
-            <a:r>
-              <a:rPr lang="en-US" sz="3200" b="1" dirty="0">
-                <a:solidFill>
-                  <a:schemeClr val="bg1"/>
-                </a:solidFill>
-              </a:rPr>
-              <a:t>5,385,471</a:t>
-            </a:r>
-            <a:endParaRPr lang="en-US" sz="3200" dirty="0"/>
-          </a:p>
-        </p:txBody>
-      </p:sp>
-      <p:sp>
-        <p:nvSpPr>
-          <p:cNvPr id="6" name="Text 4"/>
-          <p:cNvSpPr txBox="1"/>
-          <p:nvPr/>
-        </p:nvSpPr>
-        <p:spPr>
-          <a:xfrm>
-            <a:off x="731520" y="2286000"/>
-            <a:ext cx="2286000" cy="320040"/>
-          </a:xfrm>
-          <a:prstGeom prst="rect">
-            <a:avLst/>
-          </a:prstGeom>
-          <a:noFill/>
-          <a:ln/>
-        </p:spPr>
-        <p:txBody>
-          <a:bodyPr wrap="square" lIns="0" tIns="0" rIns="0" bIns="0" rtlCol="0" anchor="ctr"/>
-          <a:lstStyle/>
-          <a:p>
-            <a:pPr indent="0" marL="0">
-              <a:buNone/>
-            </a:pPr>
-            <a:r>
-              <a:rPr lang="en-US" sz="1200" b="1" spc="100" kern="0" dirty="0">
-                <a:solidFill>
-                  <a:schemeClr val="accent6"/>
-                </a:solidFill>
-              </a:rPr>
-              <a:t>TOTAL STEPS</a:t>
-            </a:r>
-            <a:endParaRPr lang="en-US" sz="1200" dirty="0"/>
-          </a:p>
-        </p:txBody>
-      </p:sp>
-      <p:sp>
-        <p:nvSpPr>
-          <p:cNvPr id="7" name="Stat card 2"/>
+          <p:cNvPr id="5" name="Card 1"/>
           <p:cNvSpPr/>
           <p:nvPr/>
         </p:nvSpPr>
         <p:spPr>
           <a:xfrm>
-            <a:off x="3383280" y="1600200"/>
-            <a:ext cx="2651760" cy="1143000"/>
+            <a:off x="548640" y="1920240"/>
+            <a:ext cx="3410712" cy="4434840"/>
           </a:xfrm>
           <a:prstGeom prst="roundRect">
             <a:avLst>
-              <a:gd name="adj" fmla="val 14400"/>
+              <a:gd name="adj" fmla="val 6702"/>
             </a:avLst>
           </a:prstGeom>
           <a:solidFill>
-            <a:srgbClr val="3D31A0"/>
-          </a:solidFill>
-          <a:ln w="12700">
+            <a:srgbClr val="FFFFFF"/>
+          </a:solidFill>
+          <a:ln w="28575">
             <a:solidFill>
-              <a:srgbClr val="3D31A0"/>
+              <a:srgbClr val="1D1763"/>
             </a:solidFill>
             <a:prstDash val="solid"/>
           </a:ln>
@@ -1684,98 +1362,24 @@
       </p:sp>
       <p:sp>
         <p:nvSpPr>
-          <p:cNvPr id="8" name="Text 6"/>
-          <p:cNvSpPr txBox="1"/>
-          <p:nvPr/>
-        </p:nvSpPr>
-        <p:spPr>
-          <a:xfrm>
-            <a:off x="3566160" y="1664208"/>
-            <a:ext cx="2286000" cy="640080"/>
-          </a:xfrm>
-          <a:prstGeom prst="rect">
-            <a:avLst/>
-          </a:prstGeom>
-          <a:noFill/>
-          <a:ln/>
-        </p:spPr>
-        <p:txBody>
-          <a:bodyPr wrap="square" lIns="0" tIns="0" rIns="0" bIns="0" rtlCol="0" anchor="ctr"/>
-          <a:lstStyle/>
-          <a:p>
-            <a:pPr indent="0" marL="0">
-              <a:buNone/>
-            </a:pPr>
-            <a:r>
-              <a:rPr lang="en-US" sz="3200" b="1" dirty="0">
-                <a:solidFill>
-                  <a:schemeClr val="bg1"/>
-                </a:solidFill>
-              </a:rPr>
-              <a:t>$1,490</a:t>
-            </a:r>
-            <a:endParaRPr lang="en-US" sz="3200" dirty="0"/>
-          </a:p>
-        </p:txBody>
-      </p:sp>
-      <p:sp>
-        <p:nvSpPr>
-          <p:cNvPr id="9" name="Text 7"/>
-          <p:cNvSpPr txBox="1"/>
-          <p:nvPr/>
-        </p:nvSpPr>
-        <p:spPr>
-          <a:xfrm>
-            <a:off x="3566160" y="2286000"/>
-            <a:ext cx="2286000" cy="320040"/>
-          </a:xfrm>
-          <a:prstGeom prst="rect">
-            <a:avLst/>
-          </a:prstGeom>
-          <a:noFill/>
-          <a:ln/>
-        </p:spPr>
-        <p:txBody>
-          <a:bodyPr wrap="square" lIns="0" tIns="0" rIns="0" bIns="0" rtlCol="0" anchor="ctr"/>
-          <a:lstStyle/>
-          <a:p>
-            <a:pPr indent="0" marL="0">
-              <a:buNone/>
-            </a:pPr>
-            <a:r>
-              <a:rPr lang="en-US" sz="1200" b="1" spc="100" kern="0" dirty="0">
-                <a:solidFill>
-                  <a:schemeClr val="accent6"/>
-                </a:solidFill>
-              </a:rPr>
-              <a:t>TOTAL RAISED (AUD)</a:t>
-            </a:r>
-            <a:endParaRPr lang="en-US" sz="1200" dirty="0"/>
-          </a:p>
-        </p:txBody>
-      </p:sp>
-      <p:sp>
-        <p:nvSpPr>
-          <p:cNvPr id="10" name="Stat card 3"/>
+          <p:cNvPr id="6" name="Badge 1"/>
           <p:cNvSpPr/>
           <p:nvPr/>
         </p:nvSpPr>
         <p:spPr>
           <a:xfrm>
-            <a:off x="6217920" y="1600200"/>
-            <a:ext cx="2651760" cy="1143000"/>
-          </a:xfrm>
-          <a:prstGeom prst="roundRect">
-            <a:avLst>
-              <a:gd name="adj" fmla="val 14400"/>
-            </a:avLst>
-          </a:prstGeom>
-          <a:solidFill>
-            <a:srgbClr val="3D31A0"/>
-          </a:solidFill>
-          <a:ln w="12700">
+            <a:off x="1801368" y="1554480"/>
+            <a:ext cx="914400" cy="914400"/>
+          </a:xfrm>
+          <a:prstGeom prst="ellipse">
+            <a:avLst/>
+          </a:prstGeom>
+          <a:solidFill>
+            <a:srgbClr val="1D1763"/>
+          </a:solidFill>
+          <a:ln w="38100">
             <a:solidFill>
-              <a:srgbClr val="3D31A0"/>
+              <a:srgbClr val="FFFFFF"/>
             </a:solidFill>
             <a:prstDash val="solid"/>
           </a:ln>
@@ -1783,98 +1387,26 @@
       </p:sp>
       <p:sp>
         <p:nvSpPr>
-          <p:cNvPr id="11" name="Text 9"/>
-          <p:cNvSpPr txBox="1"/>
-          <p:nvPr/>
-        </p:nvSpPr>
-        <p:spPr>
-          <a:xfrm>
-            <a:off x="6400800" y="1664208"/>
-            <a:ext cx="2286000" cy="640080"/>
-          </a:xfrm>
-          <a:prstGeom prst="rect">
-            <a:avLst/>
-          </a:prstGeom>
-          <a:noFill/>
-          <a:ln/>
-        </p:spPr>
-        <p:txBody>
-          <a:bodyPr wrap="square" lIns="0" tIns="0" rIns="0" bIns="0" rtlCol="0" anchor="ctr"/>
-          <a:lstStyle/>
-          <a:p>
-            <a:pPr indent="0" marL="0">
-              <a:buNone/>
-            </a:pPr>
-            <a:r>
-              <a:rPr lang="en-US" sz="3200" b="1" dirty="0">
-                <a:solidFill>
-                  <a:schemeClr val="bg1"/>
-                </a:solidFill>
-              </a:rPr>
-              <a:t>4,039 km</a:t>
-            </a:r>
-            <a:endParaRPr lang="en-US" sz="3200" dirty="0"/>
-          </a:p>
-        </p:txBody>
-      </p:sp>
-      <p:sp>
-        <p:nvSpPr>
-          <p:cNvPr id="12" name="Text 10"/>
-          <p:cNvSpPr txBox="1"/>
-          <p:nvPr/>
-        </p:nvSpPr>
-        <p:spPr>
-          <a:xfrm>
-            <a:off x="6400800" y="2286000"/>
-            <a:ext cx="2286000" cy="320040"/>
-          </a:xfrm>
-          <a:prstGeom prst="rect">
-            <a:avLst/>
-          </a:prstGeom>
-          <a:noFill/>
-          <a:ln/>
-        </p:spPr>
-        <p:txBody>
-          <a:bodyPr wrap="square" lIns="0" tIns="0" rIns="0" bIns="0" rtlCol="0" anchor="ctr"/>
-          <a:lstStyle/>
-          <a:p>
-            <a:pPr indent="0" marL="0">
-              <a:buNone/>
-            </a:pPr>
-            <a:r>
-              <a:rPr lang="en-US" sz="1200" b="1" spc="100" kern="0" dirty="0">
-                <a:solidFill>
-                  <a:schemeClr val="accent6"/>
-                </a:solidFill>
-              </a:rPr>
-              <a:t>DISTANCE WALKED</a:t>
-            </a:r>
-            <a:endParaRPr lang="en-US" sz="1200" dirty="0"/>
-          </a:p>
-        </p:txBody>
-      </p:sp>
-      <p:sp>
-        <p:nvSpPr>
-          <p:cNvPr id="13" name="Stat card 4"/>
+          <p:cNvPr id="7" name="Card 2"/>
           <p:cNvSpPr/>
           <p:nvPr/>
         </p:nvSpPr>
         <p:spPr>
           <a:xfrm>
-            <a:off x="9052560" y="1600200"/>
-            <a:ext cx="2651760" cy="1143000"/>
+            <a:off x="4389120" y="1920240"/>
+            <a:ext cx="3410712" cy="4434840"/>
           </a:xfrm>
           <a:prstGeom prst="roundRect">
             <a:avLst>
-              <a:gd name="adj" fmla="val 14400"/>
+              <a:gd name="adj" fmla="val 6702"/>
             </a:avLst>
           </a:prstGeom>
           <a:solidFill>
-            <a:srgbClr val="3D31A0"/>
-          </a:solidFill>
-          <a:ln w="12700">
+            <a:srgbClr val="FFFFFF"/>
+          </a:solidFill>
+          <a:ln w="28575">
             <a:solidFill>
-              <a:srgbClr val="3D31A0"/>
+              <a:srgbClr val="1D1763"/>
             </a:solidFill>
             <a:prstDash val="solid"/>
           </a:ln>
@@ -1882,98 +1414,24 @@
       </p:sp>
       <p:sp>
         <p:nvSpPr>
-          <p:cNvPr id="14" name="Text 12"/>
-          <p:cNvSpPr txBox="1"/>
-          <p:nvPr/>
-        </p:nvSpPr>
-        <p:spPr>
-          <a:xfrm>
-            <a:off x="9235440" y="1664208"/>
-            <a:ext cx="2286000" cy="640080"/>
-          </a:xfrm>
-          <a:prstGeom prst="rect">
-            <a:avLst/>
-          </a:prstGeom>
-          <a:noFill/>
-          <a:ln/>
-        </p:spPr>
-        <p:txBody>
-          <a:bodyPr wrap="square" lIns="0" tIns="0" rIns="0" bIns="0" rtlCol="0" anchor="ctr"/>
-          <a:lstStyle/>
-          <a:p>
-            <a:pPr indent="0" marL="0">
-              <a:buNone/>
-            </a:pPr>
-            <a:r>
-              <a:rPr lang="en-US" sz="3200" b="1" dirty="0">
-                <a:solidFill>
-                  <a:schemeClr val="bg1"/>
-                </a:solidFill>
-              </a:rPr>
-              <a:t>12</a:t>
-            </a:r>
-            <a:endParaRPr lang="en-US" sz="3200" dirty="0"/>
-          </a:p>
-        </p:txBody>
-      </p:sp>
-      <p:sp>
-        <p:nvSpPr>
-          <p:cNvPr id="15" name="Text 13"/>
-          <p:cNvSpPr txBox="1"/>
-          <p:nvPr/>
-        </p:nvSpPr>
-        <p:spPr>
-          <a:xfrm>
-            <a:off x="9235440" y="2286000"/>
-            <a:ext cx="2286000" cy="320040"/>
-          </a:xfrm>
-          <a:prstGeom prst="rect">
-            <a:avLst/>
-          </a:prstGeom>
-          <a:noFill/>
-          <a:ln/>
-        </p:spPr>
-        <p:txBody>
-          <a:bodyPr wrap="square" lIns="0" tIns="0" rIns="0" bIns="0" rtlCol="0" anchor="ctr"/>
-          <a:lstStyle/>
-          <a:p>
-            <a:pPr indent="0" marL="0">
-              <a:buNone/>
-            </a:pPr>
-            <a:r>
-              <a:rPr lang="en-US" sz="1200" b="1" spc="100" kern="0" dirty="0">
-                <a:solidFill>
-                  <a:schemeClr val="accent6"/>
-                </a:solidFill>
-              </a:rPr>
-              <a:t>STEPPERS IN 3 TEAMS</a:t>
-            </a:r>
-            <a:endParaRPr lang="en-US" sz="1200" dirty="0"/>
-          </a:p>
-        </p:txBody>
-      </p:sp>
-      <p:sp>
-        <p:nvSpPr>
-          <p:cNvPr id="16" name="Most steps card"/>
+          <p:cNvPr id="8" name="Badge 2"/>
           <p:cNvSpPr/>
           <p:nvPr/>
         </p:nvSpPr>
         <p:spPr>
           <a:xfrm>
-            <a:off x="548640" y="2926080"/>
-            <a:ext cx="5486400" cy="2331720"/>
-          </a:xfrm>
-          <a:prstGeom prst="roundRect">
-            <a:avLst>
-              <a:gd name="adj" fmla="val 7843"/>
-            </a:avLst>
-          </a:prstGeom>
-          <a:solidFill>
-            <a:schemeClr val="bg1"/>
-          </a:solidFill>
-          <a:ln w="12700">
+            <a:off x="5641848" y="1554480"/>
+            <a:ext cx="914400" cy="914400"/>
+          </a:xfrm>
+          <a:prstGeom prst="ellipse">
+            <a:avLst/>
+          </a:prstGeom>
+          <a:solidFill>
+            <a:srgbClr val="1D1763"/>
+          </a:solidFill>
+          <a:ln w="38100">
             <a:solidFill>
-              <a:schemeClr val="bg1"/>
+              <a:srgbClr val="FFFFFF"/>
             </a:solidFill>
             <a:prstDash val="solid"/>
           </a:ln>
@@ -1981,14 +1439,66 @@
       </p:sp>
       <p:sp>
         <p:nvSpPr>
-          <p:cNvPr id="17" name="Text 15"/>
+          <p:cNvPr id="9" name="Card 3"/>
+          <p:cNvSpPr/>
+          <p:nvPr/>
+        </p:nvSpPr>
+        <p:spPr>
+          <a:xfrm>
+            <a:off x="8229600" y="1920240"/>
+            <a:ext cx="3410712" cy="4434840"/>
+          </a:xfrm>
+          <a:prstGeom prst="roundRect">
+            <a:avLst>
+              <a:gd name="adj" fmla="val 6702"/>
+            </a:avLst>
+          </a:prstGeom>
+          <a:solidFill>
+            <a:srgbClr val="FFFFFF"/>
+          </a:solidFill>
+          <a:ln w="28575">
+            <a:solidFill>
+              <a:srgbClr val="1D1763"/>
+            </a:solidFill>
+            <a:prstDash val="solid"/>
+          </a:ln>
+        </p:spPr>
+      </p:sp>
+      <p:sp>
+        <p:nvSpPr>
+          <p:cNvPr id="10" name="Badge 3"/>
+          <p:cNvSpPr/>
+          <p:nvPr/>
+        </p:nvSpPr>
+        <p:spPr>
+          <a:xfrm>
+            <a:off x="9482328" y="1554480"/>
+            <a:ext cx="914400" cy="914400"/>
+          </a:xfrm>
+          <a:prstGeom prst="ellipse">
+            <a:avLst/>
+          </a:prstGeom>
+          <a:solidFill>
+            <a:srgbClr val="1D1763"/>
+          </a:solidFill>
+          <a:ln w="38100">
+            <a:solidFill>
+              <a:srgbClr val="FFFFFF"/>
+            </a:solidFill>
+            <a:prstDash val="solid"/>
+          </a:ln>
+        </p:spPr>
+      </p:sp>
+      <p:sp>
+        <p:nvSpPr>
+          <p:cNvPr id="11" name="Badge icon 1"/>
           <p:cNvSpPr txBox="1"/>
           <p:nvPr/>
         </p:nvSpPr>
         <p:spPr>
           <a:xfrm>
-            <a:off x="777240" y="2999232"/>
-            <a:ext cx="5029200" cy="548640"/>
+            <a:off x="1801368" y="1554480"/>
+            <a:ext cx="914400" cy="914400"/>
           </a:xfrm>
           <a:prstGeom prst="rect">
             <a:avLst/>
@@ -1997,33 +1507,1697 @@
           <a:ln/>
         </p:spPr>
         <p:txBody>
+          <a:bodyPr wrap="square" lIns="0" tIns="0" rIns="0" bIns="0" rtlCol="0" anchor="ctr"/>
+          <a:lstStyle/>
+          <a:p>
+            <a:pPr algn="ctr" indent="0" marL="0">
+              <a:buNone/>
+            </a:pPr>
+            <a:r>
+              <a:rPr lang="en-US" sz="2800" dirty="0">
+                <a:solidFill>
+                  <a:srgbClr val="000000"/>
+                </a:solidFill>
+              </a:rPr>
+              <a:t>🪜</a:t>
+            </a:r>
+            <a:endParaRPr lang="en-US" sz="2800" dirty="0"/>
+          </a:p>
+        </p:txBody>
+      </p:sp>
+      <p:sp>
+        <p:nvSpPr>
+          <p:cNvPr id="12" name="Badge icon 2"/>
+          <p:cNvSpPr txBox="1"/>
+          <p:nvPr/>
+        </p:nvSpPr>
+        <p:spPr>
+          <a:xfrm>
+            <a:off x="5641848" y="1554480"/>
+            <a:ext cx="914400" cy="914400"/>
+          </a:xfrm>
+          <a:prstGeom prst="rect">
+            <a:avLst/>
+          </a:prstGeom>
+          <a:noFill/>
+          <a:ln/>
+        </p:spPr>
+        <p:txBody>
+          <a:bodyPr wrap="square" lIns="0" tIns="0" rIns="0" bIns="0" rtlCol="0" anchor="ctr"/>
+          <a:lstStyle/>
+          <a:p>
+            <a:pPr algn="ctr" indent="0" marL="0">
+              <a:buNone/>
+            </a:pPr>
+            <a:r>
+              <a:rPr lang="en-US" sz="2800" dirty="0">
+                <a:solidFill>
+                  <a:srgbClr val="000000"/>
+                </a:solidFill>
+              </a:rPr>
+              <a:t>🎯</a:t>
+            </a:r>
+            <a:endParaRPr lang="en-US" sz="2800" dirty="0"/>
+          </a:p>
+        </p:txBody>
+      </p:sp>
+      <p:sp>
+        <p:nvSpPr>
+          <p:cNvPr id="13" name="Badge icon 3"/>
+          <p:cNvSpPr txBox="1"/>
+          <p:nvPr/>
+        </p:nvSpPr>
+        <p:spPr>
+          <a:xfrm>
+            <a:off x="9482328" y="1554480"/>
+            <a:ext cx="914400" cy="914400"/>
+          </a:xfrm>
+          <a:prstGeom prst="rect">
+            <a:avLst/>
+          </a:prstGeom>
+          <a:noFill/>
+          <a:ln/>
+        </p:spPr>
+        <p:txBody>
+          <a:bodyPr wrap="square" lIns="0" tIns="0" rIns="0" bIns="0" rtlCol="0" anchor="ctr"/>
+          <a:lstStyle/>
+          <a:p>
+            <a:pPr algn="ctr" indent="0" marL="0">
+              <a:buNone/>
+            </a:pPr>
+            <a:r>
+              <a:rPr lang="en-US" sz="2800" dirty="0">
+                <a:solidFill>
+                  <a:srgbClr val="000000"/>
+                </a:solidFill>
+              </a:rPr>
+              <a:t>👥</a:t>
+            </a:r>
+            <a:endParaRPr lang="en-US" sz="2800" dirty="0"/>
+          </a:p>
+        </p:txBody>
+      </p:sp>
+      <p:sp>
+        <p:nvSpPr>
+          <p:cNvPr id="14" name="Heading 1"/>
+          <p:cNvSpPr txBox="1"/>
+          <p:nvPr/>
+        </p:nvSpPr>
+        <p:spPr>
+          <a:xfrm>
+            <a:off x="731520" y="2560320"/>
+            <a:ext cx="3044952" cy="457200"/>
+          </a:xfrm>
+          <a:prstGeom prst="rect">
+            <a:avLst/>
+          </a:prstGeom>
+          <a:noFill/>
+          <a:ln/>
+        </p:spPr>
+        <p:txBody>
+          <a:bodyPr wrap="square" lIns="0" tIns="0" rIns="0" bIns="0" rtlCol="0" anchor="ctr"/>
+          <a:lstStyle/>
+          <a:p>
+            <a:pPr algn="ctr" indent="0" marL="0">
+              <a:buNone/>
+            </a:pPr>
+            <a:r>
+              <a:rPr lang="en-US" sz="2600" b="1" dirty="0">
+                <a:solidFill>
+                  <a:srgbClr val="13813F"/>
+                </a:solidFill>
+                <a:latin typeface="Arial" pitchFamily="34" charset="0"/>
+                <a:ea typeface="Arial" pitchFamily="34" charset="-122"/>
+                <a:cs typeface="Arial" pitchFamily="34" charset="-120"/>
+              </a:rPr>
+              <a:t>The Challenge</a:t>
+            </a:r>
+            <a:endParaRPr lang="en-US" sz="2600" dirty="0"/>
+          </a:p>
+        </p:txBody>
+      </p:sp>
+      <p:sp>
+        <p:nvSpPr>
+          <p:cNvPr id="15" name="Heading 2"/>
+          <p:cNvSpPr txBox="1"/>
+          <p:nvPr/>
+        </p:nvSpPr>
+        <p:spPr>
+          <a:xfrm>
+            <a:off x="4572000" y="2560320"/>
+            <a:ext cx="3044952" cy="457200"/>
+          </a:xfrm>
+          <a:prstGeom prst="rect">
+            <a:avLst/>
+          </a:prstGeom>
+          <a:noFill/>
+          <a:ln/>
+        </p:spPr>
+        <p:txBody>
+          <a:bodyPr wrap="square" lIns="0" tIns="0" rIns="0" bIns="0" rtlCol="0" anchor="ctr"/>
+          <a:lstStyle/>
+          <a:p>
+            <a:pPr algn="ctr" indent="0" marL="0">
+              <a:buNone/>
+            </a:pPr>
+            <a:r>
+              <a:rPr lang="en-US" sz="2600" b="1" dirty="0">
+                <a:solidFill>
+                  <a:srgbClr val="13813F"/>
+                </a:solidFill>
+                <a:latin typeface="Arial" pitchFamily="34" charset="0"/>
+                <a:ea typeface="Arial" pitchFamily="34" charset="-122"/>
+                <a:cs typeface="Arial" pitchFamily="34" charset="-120"/>
+              </a:rPr>
+              <a:t>Why?</a:t>
+            </a:r>
+            <a:endParaRPr lang="en-US" sz="2600" dirty="0"/>
+          </a:p>
+        </p:txBody>
+      </p:sp>
+      <p:sp>
+        <p:nvSpPr>
+          <p:cNvPr id="16" name="Heading 3"/>
+          <p:cNvSpPr txBox="1"/>
+          <p:nvPr/>
+        </p:nvSpPr>
+        <p:spPr>
+          <a:xfrm>
+            <a:off x="8412480" y="2560320"/>
+            <a:ext cx="3044952" cy="457200"/>
+          </a:xfrm>
+          <a:prstGeom prst="rect">
+            <a:avLst/>
+          </a:prstGeom>
+          <a:noFill/>
+          <a:ln/>
+        </p:spPr>
+        <p:txBody>
+          <a:bodyPr wrap="square" lIns="0" tIns="0" rIns="0" bIns="0" rtlCol="0" anchor="ctr"/>
+          <a:lstStyle/>
+          <a:p>
+            <a:pPr algn="ctr" indent="0" marL="0">
+              <a:buNone/>
+            </a:pPr>
+            <a:r>
+              <a:rPr lang="en-US" sz="2600" b="1" dirty="0">
+                <a:solidFill>
+                  <a:srgbClr val="13813F"/>
+                </a:solidFill>
+                <a:latin typeface="Arial" pitchFamily="34" charset="0"/>
+                <a:ea typeface="Arial" pitchFamily="34" charset="-122"/>
+                <a:cs typeface="Arial" pitchFamily="34" charset="-120"/>
+              </a:rPr>
+              <a:t>3 Subteams</a:t>
+            </a:r>
+            <a:endParaRPr lang="en-US" sz="2600" dirty="0"/>
+          </a:p>
+        </p:txBody>
+      </p:sp>
+      <p:sp>
+        <p:nvSpPr>
+          <p:cNvPr id="17" name="Body 1"/>
+          <p:cNvSpPr txBox="1"/>
+          <p:nvPr/>
+        </p:nvSpPr>
+        <p:spPr>
+          <a:xfrm>
+            <a:off x="777240" y="3063240"/>
+            <a:ext cx="2953512" cy="868680"/>
+          </a:xfrm>
+          <a:prstGeom prst="rect">
+            <a:avLst/>
+          </a:prstGeom>
+          <a:noFill/>
+          <a:ln/>
+        </p:spPr>
+        <p:txBody>
           <a:bodyPr wrap="square" lIns="0" tIns="0" rIns="0" bIns="0" rtlCol="0" anchor="t"/>
           <a:lstStyle/>
           <a:p>
+            <a:pPr algn="ctr" indent="0" marL="0">
+              <a:buNone/>
+            </a:pPr>
+            <a:r>
+              <a:rPr lang="en-US" sz="1800" b="1" dirty="0">
+                <a:solidFill>
+                  <a:srgbClr val="101014"/>
+                </a:solidFill>
+                <a:latin typeface="Calibri" pitchFamily="34" charset="0"/>
+                <a:ea typeface="Calibri" pitchFamily="34" charset="-122"/>
+                <a:cs typeface="Calibri" pitchFamily="34" charset="-120"/>
+              </a:rPr>
+              <a:t>Take 300,000 individual steps in September</a:t>
+            </a:r>
+            <a:endParaRPr lang="en-US" sz="1800" dirty="0"/>
+          </a:p>
+        </p:txBody>
+      </p:sp>
+      <p:sp>
+        <p:nvSpPr>
+          <p:cNvPr id="18" name="Body 2"/>
+          <p:cNvSpPr txBox="1"/>
+          <p:nvPr/>
+        </p:nvSpPr>
+        <p:spPr>
+          <a:xfrm>
+            <a:off x="4617720" y="3063240"/>
+            <a:ext cx="2953512" cy="868680"/>
+          </a:xfrm>
+          <a:prstGeom prst="rect">
+            <a:avLst/>
+          </a:prstGeom>
+          <a:noFill/>
+          <a:ln/>
+        </p:spPr>
+        <p:txBody>
+          <a:bodyPr wrap="square" lIns="0" tIns="0" rIns="0" bIns="0" rtlCol="0" anchor="t"/>
+          <a:lstStyle/>
+          <a:p>
+            <a:pPr algn="ctr" indent="0" marL="0">
+              <a:buNone/>
+            </a:pPr>
+            <a:r>
+              <a:rPr lang="en-US" sz="1800" b="1" dirty="0">
+                <a:solidFill>
+                  <a:srgbClr val="101014"/>
+                </a:solidFill>
+                <a:latin typeface="Calibri" pitchFamily="34" charset="0"/>
+                <a:ea typeface="Calibri" pitchFamily="34" charset="-122"/>
+                <a:cs typeface="Calibri" pitchFamily="34" charset="-120"/>
+              </a:rPr>
+              <a:t>Raise money and awareness for children with cerebral palsy</a:t>
+            </a:r>
+            <a:endParaRPr lang="en-US" sz="1800" dirty="0"/>
+          </a:p>
+        </p:txBody>
+      </p:sp>
+      <p:pic>
+        <p:nvPicPr>
+          <p:cNvPr id="19" name="Image 0" descr="Two hikers walking a mountain trail">    </p:cNvPr>
+          <p:cNvPicPr>
+            <a:picLocks noChangeAspect="1"/>
+          </p:cNvPicPr>
+          <p:nvPr/>
+        </p:nvPicPr>
+        <p:blipFill>
+          <a:blip r:embed="rId1"/>
+          <a:stretch>
+            <a:fillRect/>
+          </a:stretch>
+        </p:blipFill>
+        <p:spPr>
+          <a:xfrm>
+            <a:off x="790956" y="4114800"/>
+            <a:ext cx="2926080" cy="1927555"/>
+          </a:xfrm>
+          <a:prstGeom prst="rect">
+            <a:avLst/>
+          </a:prstGeom>
+        </p:spPr>
+      </p:pic>
+      <p:pic>
+        <p:nvPicPr>
+          <p:cNvPr id="20" name="Image 1" descr="A child in a wheelchair hugging a family member">    </p:cNvPr>
+          <p:cNvPicPr>
+            <a:picLocks noChangeAspect="1"/>
+          </p:cNvPicPr>
+          <p:nvPr/>
+        </p:nvPicPr>
+        <p:blipFill>
+          <a:blip r:embed="rId2"/>
+          <a:stretch>
+            <a:fillRect/>
+          </a:stretch>
+        </p:blipFill>
+        <p:spPr>
+          <a:xfrm>
+            <a:off x="4631436" y="4114800"/>
+            <a:ext cx="2926080" cy="1938528"/>
+          </a:xfrm>
+          <a:prstGeom prst="rect">
+            <a:avLst/>
+          </a:prstGeom>
+        </p:spPr>
+      </p:pic>
+      <p:sp>
+        <p:nvSpPr>
+          <p:cNvPr id="21" name="Team dot 1"/>
+          <p:cNvSpPr/>
+          <p:nvPr/>
+        </p:nvSpPr>
+        <p:spPr>
+          <a:xfrm>
+            <a:off x="8732520" y="3282696"/>
+            <a:ext cx="182880" cy="182880"/>
+          </a:xfrm>
+          <a:prstGeom prst="ellipse">
+            <a:avLst/>
+          </a:prstGeom>
+          <a:solidFill>
+            <a:srgbClr val="2A78D6"/>
+          </a:solidFill>
+          <a:ln w="12700">
+            <a:solidFill>
+              <a:srgbClr val="2A78D6"/>
+            </a:solidFill>
+            <a:prstDash val="solid"/>
+          </a:ln>
+        </p:spPr>
+      </p:sp>
+      <p:sp>
+        <p:nvSpPr>
+          <p:cNvPr id="22" name="Team 1"/>
+          <p:cNvSpPr txBox="1"/>
+          <p:nvPr/>
+        </p:nvSpPr>
+        <p:spPr>
+          <a:xfrm>
+            <a:off x="9052560" y="3200400"/>
+            <a:ext cx="2377440" cy="365760"/>
+          </a:xfrm>
+          <a:prstGeom prst="rect">
+            <a:avLst/>
+          </a:prstGeom>
+          <a:noFill/>
+          <a:ln/>
+        </p:spPr>
+        <p:txBody>
+          <a:bodyPr wrap="square" lIns="0" tIns="0" rIns="0" bIns="0" rtlCol="0" anchor="ctr"/>
+          <a:lstStyle/>
+          <a:p>
             <a:pPr indent="0" marL="0">
               <a:buNone/>
             </a:pPr>
             <a:r>
               <a:rPr lang="en-US" sz="1800" b="1" dirty="0">
                 <a:solidFill>
-                  <a:schemeClr val="tx1"/>
-                </a:solidFill>
-              </a:rPr>
-              <a:t>Most steps</a:t>
+                  <a:srgbClr val="101014"/>
+                </a:solidFill>
+                <a:latin typeface="Calibri" pitchFamily="34" charset="0"/>
+                <a:ea typeface="Calibri" pitchFamily="34" charset="-122"/>
+                <a:cs typeface="Calibri" pitchFamily="34" charset="-120"/>
+              </a:rPr>
+              <a:t>The Walkoholics</a:t>
             </a:r>
             <a:endParaRPr lang="en-US" sz="1800" dirty="0"/>
           </a:p>
+        </p:txBody>
+      </p:sp>
+      <p:sp>
+        <p:nvSpPr>
+          <p:cNvPr id="23" name="Team dot 2"/>
+          <p:cNvSpPr/>
+          <p:nvPr/>
+        </p:nvSpPr>
+        <p:spPr>
+          <a:xfrm>
+            <a:off x="8732520" y="3785616"/>
+            <a:ext cx="182880" cy="182880"/>
+          </a:xfrm>
+          <a:prstGeom prst="ellipse">
+            <a:avLst/>
+          </a:prstGeom>
+          <a:solidFill>
+            <a:srgbClr val="1BAF7A"/>
+          </a:solidFill>
+          <a:ln w="12700">
+            <a:solidFill>
+              <a:srgbClr val="1BAF7A"/>
+            </a:solidFill>
+            <a:prstDash val="solid"/>
+          </a:ln>
+        </p:spPr>
+      </p:sp>
+      <p:sp>
+        <p:nvSpPr>
+          <p:cNvPr id="24" name="Team 2"/>
+          <p:cNvSpPr txBox="1"/>
+          <p:nvPr/>
+        </p:nvSpPr>
+        <p:spPr>
+          <a:xfrm>
+            <a:off x="9052560" y="3703320"/>
+            <a:ext cx="2377440" cy="365760"/>
+          </a:xfrm>
+          <a:prstGeom prst="rect">
+            <a:avLst/>
+          </a:prstGeom>
+          <a:noFill/>
+          <a:ln/>
+        </p:spPr>
+        <p:txBody>
+          <a:bodyPr wrap="square" lIns="0" tIns="0" rIns="0" bIns="0" rtlCol="0" anchor="ctr"/>
+          <a:lstStyle/>
           <a:p>
             <a:pPr indent="0" marL="0">
               <a:buNone/>
             </a:pPr>
             <a:r>
+              <a:rPr lang="en-US" sz="1800" b="1" dirty="0">
+                <a:solidFill>
+                  <a:srgbClr val="101014"/>
+                </a:solidFill>
+                <a:latin typeface="Calibri" pitchFamily="34" charset="0"/>
+                <a:ea typeface="Calibri" pitchFamily="34" charset="-122"/>
+                <a:cs typeface="Calibri" pitchFamily="34" charset="-120"/>
+              </a:rPr>
+              <a:t>Stepping Committee</a:t>
+            </a:r>
+            <a:endParaRPr lang="en-US" sz="1800" dirty="0"/>
+          </a:p>
+        </p:txBody>
+      </p:sp>
+      <p:sp>
+        <p:nvSpPr>
+          <p:cNvPr id="25" name="Team dot 3"/>
+          <p:cNvSpPr/>
+          <p:nvPr/>
+        </p:nvSpPr>
+        <p:spPr>
+          <a:xfrm>
+            <a:off x="8732520" y="4288536"/>
+            <a:ext cx="182880" cy="182880"/>
+          </a:xfrm>
+          <a:prstGeom prst="ellipse">
+            <a:avLst/>
+          </a:prstGeom>
+          <a:solidFill>
+            <a:srgbClr val="EB6834"/>
+          </a:solidFill>
+          <a:ln w="12700">
+            <a:solidFill>
+              <a:srgbClr val="EB6834"/>
+            </a:solidFill>
+            <a:prstDash val="solid"/>
+          </a:ln>
+        </p:spPr>
+      </p:sp>
+      <p:sp>
+        <p:nvSpPr>
+          <p:cNvPr id="26" name="Team 3"/>
+          <p:cNvSpPr txBox="1"/>
+          <p:nvPr/>
+        </p:nvSpPr>
+        <p:spPr>
+          <a:xfrm>
+            <a:off x="9052560" y="4206240"/>
+            <a:ext cx="2377440" cy="365760"/>
+          </a:xfrm>
+          <a:prstGeom prst="rect">
+            <a:avLst/>
+          </a:prstGeom>
+          <a:noFill/>
+          <a:ln/>
+        </p:spPr>
+        <p:txBody>
+          <a:bodyPr wrap="square" lIns="0" tIns="0" rIns="0" bIns="0" rtlCol="0" anchor="ctr"/>
+          <a:lstStyle/>
+          <a:p>
+            <a:pPr indent="0" marL="0">
+              <a:buNone/>
+            </a:pPr>
+            <a:r>
+              <a:rPr lang="en-US" sz="1800" b="1" dirty="0">
+                <a:solidFill>
+                  <a:srgbClr val="101014"/>
+                </a:solidFill>
+                <a:latin typeface="Calibri" pitchFamily="34" charset="0"/>
+                <a:ea typeface="Calibri" pitchFamily="34" charset="-122"/>
+                <a:cs typeface="Calibri" pitchFamily="34" charset="-120"/>
+              </a:rPr>
+              <a:t>Finding Our Footing</a:t>
+            </a:r>
+            <a:endParaRPr lang="en-US" sz="1800" dirty="0"/>
+          </a:p>
+        </p:txBody>
+      </p:sp>
+      <p:sp>
+        <p:nvSpPr>
+          <p:cNvPr id="27" name="Steppers count"/>
+          <p:cNvSpPr txBox="1"/>
+          <p:nvPr/>
+        </p:nvSpPr>
+        <p:spPr>
+          <a:xfrm>
+            <a:off x="8412480" y="4892040"/>
+            <a:ext cx="3044952" cy="822960"/>
+          </a:xfrm>
+          <a:prstGeom prst="rect">
+            <a:avLst/>
+          </a:prstGeom>
+          <a:noFill/>
+          <a:ln/>
+        </p:spPr>
+        <p:txBody>
+          <a:bodyPr wrap="square" lIns="0" tIns="0" rIns="0" bIns="0" rtlCol="0" anchor="ctr"/>
+          <a:lstStyle/>
+          <a:p>
+            <a:pPr algn="ctr" indent="0" marL="0">
+              <a:buNone/>
+            </a:pPr>
+            <a:r>
+              <a:rPr lang="en-US" sz="5400" b="1" dirty="0">
+                <a:solidFill>
+                  <a:srgbClr val="1D1763"/>
+                </a:solidFill>
+                <a:latin typeface="Arial" pitchFamily="34" charset="0"/>
+                <a:ea typeface="Arial" pitchFamily="34" charset="-122"/>
+                <a:cs typeface="Arial" pitchFamily="34" charset="-120"/>
+              </a:rPr>
+              <a:t>12</a:t>
+            </a:r>
+            <a:endParaRPr lang="en-US" sz="5400" dirty="0"/>
+          </a:p>
+        </p:txBody>
+      </p:sp>
+      <p:sp>
+        <p:nvSpPr>
+          <p:cNvPr id="28" name="Steppers label"/>
+          <p:cNvSpPr txBox="1"/>
+          <p:nvPr/>
+        </p:nvSpPr>
+        <p:spPr>
+          <a:xfrm>
+            <a:off x="8412480" y="5669280"/>
+            <a:ext cx="3044952" cy="365760"/>
+          </a:xfrm>
+          <a:prstGeom prst="rect">
+            <a:avLst/>
+          </a:prstGeom>
+          <a:noFill/>
+          <a:ln/>
+        </p:spPr>
+        <p:txBody>
+          <a:bodyPr wrap="square" lIns="0" tIns="0" rIns="0" bIns="0" rtlCol="0" anchor="ctr"/>
+          <a:lstStyle/>
+          <a:p>
+            <a:pPr algn="ctr" indent="0" marL="0">
+              <a:buNone/>
+            </a:pPr>
+            <a:r>
+              <a:rPr lang="en-US" sz="1600" b="1" dirty="0">
+                <a:solidFill>
+                  <a:srgbClr val="55545F"/>
+                </a:solidFill>
+                <a:latin typeface="Calibri" pitchFamily="34" charset="0"/>
+                <a:ea typeface="Calibri" pitchFamily="34" charset="-122"/>
+                <a:cs typeface="Calibri" pitchFamily="34" charset="-120"/>
+              </a:rPr>
+              <a:t>steppers</a:t>
+            </a:r>
+            <a:endParaRPr lang="en-US" sz="1600" dirty="0"/>
+          </a:p>
+        </p:txBody>
+      </p:sp>
+    </p:spTree>
+  </p:cSld>
+  <p:clrMapOvr>
+    <a:masterClrMapping/>
+  </p:clrMapOvr>
+</p:sld>
+</file>
+
+<file path=ppt/slides/slide2.xml><?xml version="1.0" encoding="utf-8"?>
+<p:sld xmlns:a="http://schemas.openxmlformats.org/drawingml/2006/main" xmlns:r="http://schemas.openxmlformats.org/officeDocument/2006/relationships" xmlns:p="http://schemas.openxmlformats.org/presentationml/2006/main">
+  <p:cSld name="Slide 2">
+    <p:bg>
+      <p:bgPr>
+        <a:solidFill>
+          <a:srgbClr val="FFFFFF"/>
+        </a:solidFill>
+      </p:bgPr>
+    </p:bg>
+    <p:spTree>
+      <p:nvGrpSpPr>
+        <p:cNvPr id="1" name=""/>
+        <p:cNvGrpSpPr/>
+        <p:nvPr/>
+      </p:nvGrpSpPr>
+      <p:grpSpPr>
+        <a:xfrm>
+          <a:off x="0" y="0"/>
+          <a:ext cx="0" cy="0"/>
+          <a:chOff x="0" y="0"/>
+          <a:chExt cx="0" cy="0"/>
+        </a:xfrm>
+      </p:grpSpPr>
+      <p:sp>
+        <p:nvSpPr>
+          <p:cNvPr id="2" name="Title"/>
+          <p:cNvSpPr txBox="1"/>
+          <p:nvPr/>
+        </p:nvSpPr>
+        <p:spPr>
+          <a:xfrm>
+            <a:off x="548640" y="320040"/>
+            <a:ext cx="11064240" cy="731520"/>
+          </a:xfrm>
+          <a:prstGeom prst="rect">
+            <a:avLst/>
+          </a:prstGeom>
+          <a:noFill/>
+          <a:ln/>
+        </p:spPr>
+        <p:txBody>
+          <a:bodyPr wrap="square" lIns="0" tIns="0" rIns="0" bIns="0" rtlCol="0" anchor="ctr"/>
+          <a:lstStyle/>
+          <a:p>
+            <a:pPr indent="0" marL="0">
+              <a:buNone/>
+            </a:pPr>
+            <a:r>
+              <a:rPr lang="en-US" sz="4000" b="1" dirty="0">
+                <a:solidFill>
+                  <a:srgbClr val="101014"/>
+                </a:solidFill>
+                <a:latin typeface="Arial" pitchFamily="34" charset="0"/>
+                <a:ea typeface="Arial" pitchFamily="34" charset="-122"/>
+                <a:cs typeface="Arial" pitchFamily="34" charset="-120"/>
+              </a:rPr>
+              <a:t>TDC Canberra – Steptember Results</a:t>
+            </a:r>
+            <a:endParaRPr lang="en-US" sz="4000" dirty="0"/>
+          </a:p>
+        </p:txBody>
+      </p:sp>
+      <p:sp>
+        <p:nvSpPr>
+          <p:cNvPr id="3" name="Subtitle"/>
+          <p:cNvSpPr txBox="1"/>
+          <p:nvPr/>
+        </p:nvSpPr>
+        <p:spPr>
+          <a:xfrm>
+            <a:off x="548640" y="1005840"/>
+            <a:ext cx="11064240" cy="320040"/>
+          </a:xfrm>
+          <a:prstGeom prst="rect">
+            <a:avLst/>
+          </a:prstGeom>
+          <a:noFill/>
+          <a:ln/>
+        </p:spPr>
+        <p:txBody>
+          <a:bodyPr wrap="square" lIns="0" tIns="0" rIns="0" bIns="0" rtlCol="0" anchor="ctr"/>
+          <a:lstStyle/>
+          <a:p>
+            <a:pPr indent="0" marL="0">
+              <a:buNone/>
+            </a:pPr>
+            <a:r>
+              <a:rPr lang="en-US" sz="1600" dirty="0">
+                <a:solidFill>
+                  <a:srgbClr val="55545F"/>
+                </a:solidFill>
+                <a:latin typeface="Calibri" pitchFamily="34" charset="0"/>
+                <a:ea typeface="Calibri" pitchFamily="34" charset="-122"/>
+                <a:cs typeface="Calibri" pitchFamily="34" charset="-120"/>
+              </a:rPr>
+              <a:t>Raising money for the Cerebral Palsy Alliance  ·  September 2026</a:t>
+            </a:r>
+            <a:endParaRPr lang="en-US" sz="1600" dirty="0"/>
+          </a:p>
+        </p:txBody>
+      </p:sp>
+      <p:sp>
+        <p:nvSpPr>
+          <p:cNvPr id="4" name="Mission box"/>
+          <p:cNvSpPr/>
+          <p:nvPr/>
+        </p:nvSpPr>
+        <p:spPr>
+          <a:xfrm>
+            <a:off x="548640" y="1508760"/>
+            <a:ext cx="11091672" cy="1691640"/>
+          </a:xfrm>
+          <a:prstGeom prst="roundRect">
+            <a:avLst>
+              <a:gd name="adj" fmla="val 13514"/>
+            </a:avLst>
+          </a:prstGeom>
+          <a:solidFill>
+            <a:srgbClr val="F2F2F5"/>
+          </a:solidFill>
+          <a:ln w="31750">
+            <a:solidFill>
+              <a:srgbClr val="8A2BE2"/>
+            </a:solidFill>
+            <a:prstDash val="dash"/>
+          </a:ln>
+        </p:spPr>
+      </p:sp>
+      <p:sp>
+        <p:nvSpPr>
+          <p:cNvPr id="5" name="Mission heading"/>
+          <p:cNvSpPr txBox="1"/>
+          <p:nvPr/>
+        </p:nvSpPr>
+        <p:spPr>
+          <a:xfrm>
+            <a:off x="548640" y="1572768"/>
+            <a:ext cx="11091672" cy="457200"/>
+          </a:xfrm>
+          <a:prstGeom prst="rect">
+            <a:avLst/>
+          </a:prstGeom>
+          <a:noFill/>
+          <a:ln/>
+        </p:spPr>
+        <p:txBody>
+          <a:bodyPr wrap="square" lIns="0" tIns="0" rIns="0" bIns="0" rtlCol="0" anchor="ctr"/>
+          <a:lstStyle/>
+          <a:p>
+            <a:pPr algn="ctr" indent="0" marL="0">
+              <a:buNone/>
+            </a:pPr>
+            <a:r>
+              <a:rPr lang="en-US" sz="2600" b="1" dirty="0">
+                <a:solidFill>
+                  <a:srgbClr val="2B2170"/>
+                </a:solidFill>
+                <a:latin typeface="Arial" pitchFamily="34" charset="0"/>
+                <a:ea typeface="Arial" pitchFamily="34" charset="-122"/>
+                <a:cs typeface="Arial" pitchFamily="34" charset="-120"/>
+              </a:rPr>
+              <a:t>🎉 Mission accomplished! 🎉</a:t>
+            </a:r>
+            <a:endParaRPr lang="en-US" sz="2600" dirty="0"/>
+          </a:p>
+        </p:txBody>
+      </p:sp>
+      <p:sp>
+        <p:nvSpPr>
+          <p:cNvPr id="6" name="Mission rule"/>
+          <p:cNvSpPr/>
+          <p:nvPr/>
+        </p:nvSpPr>
+        <p:spPr>
+          <a:xfrm>
+            <a:off x="868680" y="2084832"/>
+            <a:ext cx="10451592" cy="0"/>
+          </a:xfrm>
+          <a:prstGeom prst="line">
+            <a:avLst/>
+          </a:prstGeom>
+          <a:noFill/>
+          <a:ln w="19050">
+            <a:solidFill>
+              <a:srgbClr val="E3A6F0"/>
+            </a:solidFill>
+            <a:prstDash val="solid"/>
+          </a:ln>
+        </p:spPr>
+      </p:sp>
+      <p:sp>
+        <p:nvSpPr>
+          <p:cNvPr id="7" name="Stat 1"/>
+          <p:cNvSpPr txBox="1"/>
+          <p:nvPr/>
+        </p:nvSpPr>
+        <p:spPr>
+          <a:xfrm>
+            <a:off x="868680" y="2194560"/>
+            <a:ext cx="2468880" cy="640080"/>
+          </a:xfrm>
+          <a:prstGeom prst="rect">
+            <a:avLst/>
+          </a:prstGeom>
+          <a:noFill/>
+          <a:ln/>
+        </p:spPr>
+        <p:txBody>
+          <a:bodyPr wrap="square" lIns="0" tIns="0" rIns="0" bIns="0" rtlCol="0" anchor="ctr"/>
+          <a:lstStyle/>
+          <a:p>
+            <a:pPr algn="ctr" indent="0" marL="0">
+              <a:buNone/>
+            </a:pPr>
+            <a:r>
+              <a:rPr lang="en-US" sz="3200" b="1" dirty="0">
+                <a:solidFill>
+                  <a:srgbClr val="101014"/>
+                </a:solidFill>
+                <a:latin typeface="Arial" pitchFamily="34" charset="0"/>
+                <a:ea typeface="Arial" pitchFamily="34" charset="-122"/>
+                <a:cs typeface="Arial" pitchFamily="34" charset="-120"/>
+              </a:rPr>
+              <a:t>5,385,471</a:t>
+            </a:r>
+            <a:endParaRPr lang="en-US" sz="3200" dirty="0"/>
+          </a:p>
+        </p:txBody>
+      </p:sp>
+      <p:sp>
+        <p:nvSpPr>
+          <p:cNvPr id="8" name="Stat label 1"/>
+          <p:cNvSpPr txBox="1"/>
+          <p:nvPr/>
+        </p:nvSpPr>
+        <p:spPr>
+          <a:xfrm>
+            <a:off x="868680" y="2816352"/>
+            <a:ext cx="2468880" cy="274320"/>
+          </a:xfrm>
+          <a:prstGeom prst="rect">
+            <a:avLst/>
+          </a:prstGeom>
+          <a:noFill/>
+          <a:ln/>
+        </p:spPr>
+        <p:txBody>
+          <a:bodyPr wrap="square" lIns="0" tIns="0" rIns="0" bIns="0" rtlCol="0" anchor="ctr"/>
+          <a:lstStyle/>
+          <a:p>
+            <a:pPr algn="ctr" indent="0" marL="0">
+              <a:buNone/>
+            </a:pPr>
+            <a:r>
+              <a:rPr lang="en-US" sz="1200" b="1" spc="100" kern="0" dirty="0">
+                <a:solidFill>
+                  <a:srgbClr val="55545F"/>
+                </a:solidFill>
+                <a:latin typeface="Calibri" pitchFamily="34" charset="0"/>
+                <a:ea typeface="Calibri" pitchFamily="34" charset="-122"/>
+                <a:cs typeface="Calibri" pitchFamily="34" charset="-120"/>
+              </a:rPr>
+              <a:t>TOTAL STEPS</a:t>
+            </a:r>
+            <a:endParaRPr lang="en-US" sz="1200" dirty="0"/>
+          </a:p>
+        </p:txBody>
+      </p:sp>
+      <p:sp>
+        <p:nvSpPr>
+          <p:cNvPr id="9" name="Stat 2"/>
+          <p:cNvSpPr txBox="1"/>
+          <p:nvPr/>
+        </p:nvSpPr>
+        <p:spPr>
+          <a:xfrm>
+            <a:off x="3483864" y="2194560"/>
+            <a:ext cx="2468880" cy="640080"/>
+          </a:xfrm>
+          <a:prstGeom prst="rect">
+            <a:avLst/>
+          </a:prstGeom>
+          <a:noFill/>
+          <a:ln/>
+        </p:spPr>
+        <p:txBody>
+          <a:bodyPr wrap="square" lIns="0" tIns="0" rIns="0" bIns="0" rtlCol="0" anchor="ctr"/>
+          <a:lstStyle/>
+          <a:p>
+            <a:pPr algn="ctr" indent="0" marL="0">
+              <a:buNone/>
+            </a:pPr>
+            <a:r>
+              <a:rPr lang="en-US" sz="3200" b="1" dirty="0">
+                <a:solidFill>
+                  <a:srgbClr val="101014"/>
+                </a:solidFill>
+                <a:latin typeface="Arial" pitchFamily="34" charset="0"/>
+                <a:ea typeface="Arial" pitchFamily="34" charset="-122"/>
+                <a:cs typeface="Arial" pitchFamily="34" charset="-120"/>
+              </a:rPr>
+              <a:t>$1,490</a:t>
+            </a:r>
+            <a:endParaRPr lang="en-US" sz="3200" dirty="0"/>
+          </a:p>
+        </p:txBody>
+      </p:sp>
+      <p:sp>
+        <p:nvSpPr>
+          <p:cNvPr id="10" name="Stat label 2"/>
+          <p:cNvSpPr txBox="1"/>
+          <p:nvPr/>
+        </p:nvSpPr>
+        <p:spPr>
+          <a:xfrm>
+            <a:off x="3483864" y="2816352"/>
+            <a:ext cx="2468880" cy="274320"/>
+          </a:xfrm>
+          <a:prstGeom prst="rect">
+            <a:avLst/>
+          </a:prstGeom>
+          <a:noFill/>
+          <a:ln/>
+        </p:spPr>
+        <p:txBody>
+          <a:bodyPr wrap="square" lIns="0" tIns="0" rIns="0" bIns="0" rtlCol="0" anchor="ctr"/>
+          <a:lstStyle/>
+          <a:p>
+            <a:pPr algn="ctr" indent="0" marL="0">
+              <a:buNone/>
+            </a:pPr>
+            <a:r>
+              <a:rPr lang="en-US" sz="1200" b="1" spc="100" kern="0" dirty="0">
+                <a:solidFill>
+                  <a:srgbClr val="55545F"/>
+                </a:solidFill>
+                <a:latin typeface="Calibri" pitchFamily="34" charset="0"/>
+                <a:ea typeface="Calibri" pitchFamily="34" charset="-122"/>
+                <a:cs typeface="Calibri" pitchFamily="34" charset="-120"/>
+              </a:rPr>
+              <a:t>TOTAL RAISED (AUD)</a:t>
+            </a:r>
+            <a:endParaRPr lang="en-US" sz="1200" dirty="0"/>
+          </a:p>
+        </p:txBody>
+      </p:sp>
+      <p:sp>
+        <p:nvSpPr>
+          <p:cNvPr id="11" name="Stat 3"/>
+          <p:cNvSpPr txBox="1"/>
+          <p:nvPr/>
+        </p:nvSpPr>
+        <p:spPr>
+          <a:xfrm>
+            <a:off x="6099048" y="2194560"/>
+            <a:ext cx="2468880" cy="640080"/>
+          </a:xfrm>
+          <a:prstGeom prst="rect">
+            <a:avLst/>
+          </a:prstGeom>
+          <a:noFill/>
+          <a:ln/>
+        </p:spPr>
+        <p:txBody>
+          <a:bodyPr wrap="square" lIns="0" tIns="0" rIns="0" bIns="0" rtlCol="0" anchor="ctr"/>
+          <a:lstStyle/>
+          <a:p>
+            <a:pPr algn="ctr" indent="0" marL="0">
+              <a:buNone/>
+            </a:pPr>
+            <a:r>
+              <a:rPr lang="en-US" sz="3200" b="1" dirty="0">
+                <a:solidFill>
+                  <a:srgbClr val="101014"/>
+                </a:solidFill>
+                <a:latin typeface="Arial" pitchFamily="34" charset="0"/>
+                <a:ea typeface="Arial" pitchFamily="34" charset="-122"/>
+                <a:cs typeface="Arial" pitchFamily="34" charset="-120"/>
+              </a:rPr>
+              <a:t>4,039 km</a:t>
+            </a:r>
+            <a:endParaRPr lang="en-US" sz="3200" dirty="0"/>
+          </a:p>
+        </p:txBody>
+      </p:sp>
+      <p:sp>
+        <p:nvSpPr>
+          <p:cNvPr id="12" name="Stat label 3"/>
+          <p:cNvSpPr txBox="1"/>
+          <p:nvPr/>
+        </p:nvSpPr>
+        <p:spPr>
+          <a:xfrm>
+            <a:off x="6099048" y="2816352"/>
+            <a:ext cx="2468880" cy="274320"/>
+          </a:xfrm>
+          <a:prstGeom prst="rect">
+            <a:avLst/>
+          </a:prstGeom>
+          <a:noFill/>
+          <a:ln/>
+        </p:spPr>
+        <p:txBody>
+          <a:bodyPr wrap="square" lIns="0" tIns="0" rIns="0" bIns="0" rtlCol="0" anchor="ctr"/>
+          <a:lstStyle/>
+          <a:p>
+            <a:pPr algn="ctr" indent="0" marL="0">
+              <a:buNone/>
+            </a:pPr>
+            <a:r>
+              <a:rPr lang="en-US" sz="1200" b="1" spc="100" kern="0" dirty="0">
+                <a:solidFill>
+                  <a:srgbClr val="55545F"/>
+                </a:solidFill>
+                <a:latin typeface="Calibri" pitchFamily="34" charset="0"/>
+                <a:ea typeface="Calibri" pitchFamily="34" charset="-122"/>
+                <a:cs typeface="Calibri" pitchFamily="34" charset="-120"/>
+              </a:rPr>
+              <a:t>DISTANCE WALKED</a:t>
+            </a:r>
+            <a:endParaRPr lang="en-US" sz="1200" dirty="0"/>
+          </a:p>
+        </p:txBody>
+      </p:sp>
+      <p:sp>
+        <p:nvSpPr>
+          <p:cNvPr id="13" name="Stat 4"/>
+          <p:cNvSpPr txBox="1"/>
+          <p:nvPr/>
+        </p:nvSpPr>
+        <p:spPr>
+          <a:xfrm>
+            <a:off x="8714232" y="2194560"/>
+            <a:ext cx="2468880" cy="640080"/>
+          </a:xfrm>
+          <a:prstGeom prst="rect">
+            <a:avLst/>
+          </a:prstGeom>
+          <a:noFill/>
+          <a:ln/>
+        </p:spPr>
+        <p:txBody>
+          <a:bodyPr wrap="square" lIns="0" tIns="0" rIns="0" bIns="0" rtlCol="0" anchor="ctr"/>
+          <a:lstStyle/>
+          <a:p>
+            <a:pPr algn="ctr" indent="0" marL="0">
+              <a:buNone/>
+            </a:pPr>
+            <a:r>
+              <a:rPr lang="en-US" sz="3200" b="1" dirty="0">
+                <a:solidFill>
+                  <a:srgbClr val="101014"/>
+                </a:solidFill>
+                <a:latin typeface="Arial" pitchFamily="34" charset="0"/>
+                <a:ea typeface="Arial" pitchFamily="34" charset="-122"/>
+                <a:cs typeface="Arial" pitchFamily="34" charset="-120"/>
+              </a:rPr>
+              <a:t>12</a:t>
+            </a:r>
+            <a:endParaRPr lang="en-US" sz="3200" dirty="0"/>
+          </a:p>
+        </p:txBody>
+      </p:sp>
+      <p:sp>
+        <p:nvSpPr>
+          <p:cNvPr id="14" name="Stat label 4"/>
+          <p:cNvSpPr txBox="1"/>
+          <p:nvPr/>
+        </p:nvSpPr>
+        <p:spPr>
+          <a:xfrm>
+            <a:off x="8714232" y="2816352"/>
+            <a:ext cx="2468880" cy="274320"/>
+          </a:xfrm>
+          <a:prstGeom prst="rect">
+            <a:avLst/>
+          </a:prstGeom>
+          <a:noFill/>
+          <a:ln/>
+        </p:spPr>
+        <p:txBody>
+          <a:bodyPr wrap="square" lIns="0" tIns="0" rIns="0" bIns="0" rtlCol="0" anchor="ctr"/>
+          <a:lstStyle/>
+          <a:p>
+            <a:pPr algn="ctr" indent="0" marL="0">
+              <a:buNone/>
+            </a:pPr>
+            <a:r>
+              <a:rPr lang="en-US" sz="1200" b="1" spc="100" kern="0" dirty="0">
+                <a:solidFill>
+                  <a:srgbClr val="55545F"/>
+                </a:solidFill>
+                <a:latin typeface="Calibri" pitchFamily="34" charset="0"/>
+                <a:ea typeface="Calibri" pitchFamily="34" charset="-122"/>
+                <a:cs typeface="Calibri" pitchFamily="34" charset="-120"/>
+              </a:rPr>
+              <a:t>STEPPERS IN 3 TEAMS</a:t>
+            </a:r>
+            <a:endParaRPr lang="en-US" sz="1200" dirty="0"/>
+          </a:p>
+        </p:txBody>
+      </p:sp>
+      <p:sp>
+        <p:nvSpPr>
+          <p:cNvPr id="15" name="Podium panel"/>
+          <p:cNvSpPr/>
+          <p:nvPr/>
+        </p:nvSpPr>
+        <p:spPr>
+          <a:xfrm>
+            <a:off x="548640" y="3429000"/>
+            <a:ext cx="6766560" cy="3017520"/>
+          </a:xfrm>
+          <a:prstGeom prst="roundRect">
+            <a:avLst>
+              <a:gd name="adj" fmla="val 7576"/>
+            </a:avLst>
+          </a:prstGeom>
+          <a:solidFill>
+            <a:srgbClr val="FFFFFF"/>
+          </a:solidFill>
+          <a:ln w="28575">
+            <a:solidFill>
+              <a:srgbClr val="1D1763"/>
+            </a:solidFill>
+            <a:prstDash val="solid"/>
+          </a:ln>
+        </p:spPr>
+      </p:sp>
+      <p:sp>
+        <p:nvSpPr>
+          <p:cNvPr id="16" name="Podium heading"/>
+          <p:cNvSpPr txBox="1"/>
+          <p:nvPr/>
+        </p:nvSpPr>
+        <p:spPr>
+          <a:xfrm>
+            <a:off x="822960" y="3520440"/>
+            <a:ext cx="4572000" cy="365760"/>
+          </a:xfrm>
+          <a:prstGeom prst="rect">
+            <a:avLst/>
+          </a:prstGeom>
+          <a:noFill/>
+          <a:ln/>
+        </p:spPr>
+        <p:txBody>
+          <a:bodyPr wrap="square" lIns="0" tIns="0" rIns="0" bIns="0" rtlCol="0" anchor="ctr"/>
+          <a:lstStyle/>
+          <a:p>
+            <a:pPr indent="0" marL="0">
+              <a:buNone/>
+            </a:pPr>
+            <a:r>
+              <a:rPr lang="en-US" sz="2000" b="1" dirty="0">
+                <a:solidFill>
+                  <a:srgbClr val="13813F"/>
+                </a:solidFill>
+                <a:latin typeface="Arial" pitchFamily="34" charset="0"/>
+                <a:ea typeface="Arial" pitchFamily="34" charset="-122"/>
+                <a:cs typeface="Arial" pitchFamily="34" charset="-120"/>
+              </a:rPr>
+              <a:t>🏆 Most steps</a:t>
+            </a:r>
+            <a:endParaRPr lang="en-US" sz="2000" dirty="0"/>
+          </a:p>
+        </p:txBody>
+      </p:sp>
+      <p:sp>
+        <p:nvSpPr>
+          <p:cNvPr id="17" name="Podium subheading"/>
+          <p:cNvSpPr txBox="1"/>
+          <p:nvPr/>
+        </p:nvSpPr>
+        <p:spPr>
+          <a:xfrm>
+            <a:off x="822960" y="3858768"/>
+            <a:ext cx="4572000" cy="274320"/>
+          </a:xfrm>
+          <a:prstGeom prst="rect">
+            <a:avLst/>
+          </a:prstGeom>
+          <a:noFill/>
+          <a:ln/>
+        </p:spPr>
+        <p:txBody>
+          <a:bodyPr wrap="square" lIns="0" tIns="0" rIns="0" bIns="0" rtlCol="0" anchor="ctr"/>
+          <a:lstStyle/>
+          <a:p>
+            <a:pPr indent="0" marL="0">
+              <a:buNone/>
+            </a:pPr>
+            <a:r>
               <a:rPr lang="en-US" sz="1200" dirty="0">
                 <a:solidFill>
                   <a:srgbClr val="55545F"/>
                 </a:solidFill>
-              </a:rPr>
-              <a:t>Team total across four steppers (thousands)</a:t>
+                <a:latin typeface="Calibri" pitchFamily="34" charset="0"/>
+                <a:ea typeface="Calibri" pitchFamily="34" charset="-122"/>
+                <a:cs typeface="Calibri" pitchFamily="34" charset="-120"/>
+              </a:rPr>
+              <a:t>Top three steppers</a:t>
+            </a:r>
+            <a:endParaRPr lang="en-US" sz="1200" dirty="0"/>
+          </a:p>
+        </p:txBody>
+      </p:sp>
+      <p:sp>
+        <p:nvSpPr>
+          <p:cNvPr id="18" name="Podium block 2"/>
+          <p:cNvSpPr/>
+          <p:nvPr/>
+        </p:nvSpPr>
+        <p:spPr>
+          <a:xfrm>
+            <a:off x="822960" y="5394960"/>
+            <a:ext cx="1920240" cy="868680"/>
+          </a:xfrm>
+          <a:prstGeom prst="rect">
+            <a:avLst/>
+          </a:prstGeom>
+          <a:solidFill>
+            <a:srgbClr val="C9C2F3"/>
+          </a:solidFill>
+          <a:ln w="12700">
+            <a:solidFill>
+              <a:srgbClr val="C9C2F3"/>
+            </a:solidFill>
+            <a:prstDash val="solid"/>
+          </a:ln>
+        </p:spPr>
+      </p:sp>
+      <p:sp>
+        <p:nvSpPr>
+          <p:cNvPr id="19" name="Podium rank 2"/>
+          <p:cNvSpPr txBox="1"/>
+          <p:nvPr/>
+        </p:nvSpPr>
+        <p:spPr>
+          <a:xfrm>
+            <a:off x="822960" y="5440680"/>
+            <a:ext cx="1920240" cy="548640"/>
+          </a:xfrm>
+          <a:prstGeom prst="rect">
+            <a:avLst/>
+          </a:prstGeom>
+          <a:noFill/>
+          <a:ln/>
+        </p:spPr>
+        <p:txBody>
+          <a:bodyPr wrap="square" lIns="0" tIns="0" rIns="0" bIns="0" rtlCol="0" anchor="t"/>
+          <a:lstStyle/>
+          <a:p>
+            <a:pPr algn="ctr" indent="0" marL="0">
+              <a:buNone/>
+            </a:pPr>
+            <a:r>
+              <a:rPr lang="en-US" sz="2800" b="1" dirty="0">
+                <a:solidFill>
+                  <a:srgbClr val="101014"/>
+                </a:solidFill>
+                <a:latin typeface="Arial" pitchFamily="34" charset="0"/>
+                <a:ea typeface="Arial" pitchFamily="34" charset="-122"/>
+                <a:cs typeface="Arial" pitchFamily="34" charset="-120"/>
+              </a:rPr>
+              <a:t>2</a:t>
+            </a:r>
+            <a:endParaRPr lang="en-US" sz="2800" dirty="0"/>
+          </a:p>
+        </p:txBody>
+      </p:sp>
+      <p:sp>
+        <p:nvSpPr>
+          <p:cNvPr id="20" name="Podium label 2"/>
+          <p:cNvSpPr txBox="1"/>
+          <p:nvPr/>
+        </p:nvSpPr>
+        <p:spPr>
+          <a:xfrm>
+            <a:off x="822960" y="4526280"/>
+            <a:ext cx="1920240" cy="822960"/>
+          </a:xfrm>
+          <a:prstGeom prst="rect">
+            <a:avLst/>
+          </a:prstGeom>
+          <a:noFill/>
+          <a:ln/>
+        </p:spPr>
+        <p:txBody>
+          <a:bodyPr wrap="square" lIns="0" tIns="0" rIns="0" bIns="0" rtlCol="0" anchor="b"/>
+          <a:lstStyle/>
+          <a:p>
+            <a:pPr algn="ctr" indent="0" marL="0">
+              <a:buNone/>
+            </a:pPr>
+            <a:r>
+              <a:rPr lang="en-US" sz="1600" b="1" dirty="0">
+                <a:solidFill>
+                  <a:srgbClr val="101014"/>
+                </a:solidFill>
+                <a:latin typeface="Calibri" pitchFamily="34" charset="0"/>
+                <a:ea typeface="Calibri" pitchFamily="34" charset="-122"/>
+                <a:cs typeface="Calibri" pitchFamily="34" charset="-120"/>
+              </a:rPr>
+              <a:t>Dionne Marks</a:t>
+            </a:r>
+            <a:endParaRPr lang="en-US" sz="1600" dirty="0"/>
+          </a:p>
+          <a:p>
+            <a:pPr algn="ctr" indent="0" marL="0">
+              <a:buNone/>
+            </a:pPr>
+            <a:r>
+              <a:rPr lang="en-US" sz="1400" b="1" dirty="0">
+                <a:solidFill>
+                  <a:srgbClr val="55545F"/>
+                </a:solidFill>
+                <a:latin typeface="Calibri" pitchFamily="34" charset="0"/>
+                <a:ea typeface="Calibri" pitchFamily="34" charset="-122"/>
+                <a:cs typeface="Calibri" pitchFamily="34" charset="-120"/>
+              </a:rPr>
+              <a:t>592,773</a:t>
+            </a:r>
+            <a:endParaRPr lang="en-US" sz="1600" dirty="0"/>
+          </a:p>
+          <a:p>
+            <a:pPr algn="ctr" indent="0" marL="0">
+              <a:buNone/>
+            </a:pPr>
+            <a:r>
+              <a:rPr lang="en-US" sz="1100" dirty="0">
+                <a:solidFill>
+                  <a:srgbClr val="55545F"/>
+                </a:solidFill>
+                <a:latin typeface="Calibri" pitchFamily="34" charset="0"/>
+                <a:ea typeface="Calibri" pitchFamily="34" charset="-122"/>
+                <a:cs typeface="Calibri" pitchFamily="34" charset="-120"/>
+              </a:rPr>
+              <a:t>Finding Our Footing</a:t>
+            </a:r>
+            <a:endParaRPr lang="en-US" sz="1600" dirty="0"/>
+          </a:p>
+        </p:txBody>
+      </p:sp>
+      <p:sp>
+        <p:nvSpPr>
+          <p:cNvPr id="21" name="Podium block 1"/>
+          <p:cNvSpPr/>
+          <p:nvPr/>
+        </p:nvSpPr>
+        <p:spPr>
+          <a:xfrm>
+            <a:off x="2971800" y="5074920"/>
+            <a:ext cx="1920240" cy="1188720"/>
+          </a:xfrm>
+          <a:prstGeom prst="rect">
+            <a:avLst/>
+          </a:prstGeom>
+          <a:solidFill>
+            <a:srgbClr val="F7B955"/>
+          </a:solidFill>
+          <a:ln w="12700">
+            <a:solidFill>
+              <a:srgbClr val="F7B955"/>
+            </a:solidFill>
+            <a:prstDash val="solid"/>
+          </a:ln>
+        </p:spPr>
+      </p:sp>
+      <p:sp>
+        <p:nvSpPr>
+          <p:cNvPr id="22" name="Podium rank 1"/>
+          <p:cNvSpPr txBox="1"/>
+          <p:nvPr/>
+        </p:nvSpPr>
+        <p:spPr>
+          <a:xfrm>
+            <a:off x="2971800" y="5120640"/>
+            <a:ext cx="1920240" cy="548640"/>
+          </a:xfrm>
+          <a:prstGeom prst="rect">
+            <a:avLst/>
+          </a:prstGeom>
+          <a:noFill/>
+          <a:ln/>
+        </p:spPr>
+        <p:txBody>
+          <a:bodyPr wrap="square" lIns="0" tIns="0" rIns="0" bIns="0" rtlCol="0" anchor="t"/>
+          <a:lstStyle/>
+          <a:p>
+            <a:pPr algn="ctr" indent="0" marL="0">
+              <a:buNone/>
+            </a:pPr>
+            <a:r>
+              <a:rPr lang="en-US" sz="2800" b="1" dirty="0">
+                <a:solidFill>
+                  <a:srgbClr val="101014"/>
+                </a:solidFill>
+                <a:latin typeface="Arial" pitchFamily="34" charset="0"/>
+                <a:ea typeface="Arial" pitchFamily="34" charset="-122"/>
+                <a:cs typeface="Arial" pitchFamily="34" charset="-120"/>
+              </a:rPr>
+              <a:t>1</a:t>
+            </a:r>
+            <a:endParaRPr lang="en-US" sz="2800" dirty="0"/>
+          </a:p>
+        </p:txBody>
+      </p:sp>
+      <p:sp>
+        <p:nvSpPr>
+          <p:cNvPr id="23" name="Podium label 1"/>
+          <p:cNvSpPr txBox="1"/>
+          <p:nvPr/>
+        </p:nvSpPr>
+        <p:spPr>
+          <a:xfrm>
+            <a:off x="2971800" y="4206240"/>
+            <a:ext cx="1920240" cy="822960"/>
+          </a:xfrm>
+          <a:prstGeom prst="rect">
+            <a:avLst/>
+          </a:prstGeom>
+          <a:noFill/>
+          <a:ln/>
+        </p:spPr>
+        <p:txBody>
+          <a:bodyPr wrap="square" lIns="0" tIns="0" rIns="0" bIns="0" rtlCol="0" anchor="b"/>
+          <a:lstStyle/>
+          <a:p>
+            <a:pPr algn="ctr" indent="0" marL="0">
+              <a:buNone/>
+            </a:pPr>
+            <a:r>
+              <a:rPr lang="en-US" sz="1600" b="1" dirty="0">
+                <a:solidFill>
+                  <a:srgbClr val="101014"/>
+                </a:solidFill>
+                <a:latin typeface="Calibri" pitchFamily="34" charset="0"/>
+                <a:ea typeface="Calibri" pitchFamily="34" charset="-122"/>
+                <a:cs typeface="Calibri" pitchFamily="34" charset="-120"/>
+              </a:rPr>
+              <a:t>ben walker</a:t>
+            </a:r>
+            <a:endParaRPr lang="en-US" sz="1600" dirty="0"/>
+          </a:p>
+          <a:p>
+            <a:pPr algn="ctr" indent="0" marL="0">
+              <a:buNone/>
+            </a:pPr>
+            <a:r>
+              <a:rPr lang="en-US" sz="1400" b="1" dirty="0">
+                <a:solidFill>
+                  <a:srgbClr val="55545F"/>
+                </a:solidFill>
+                <a:latin typeface="Calibri" pitchFamily="34" charset="0"/>
+                <a:ea typeface="Calibri" pitchFamily="34" charset="-122"/>
+                <a:cs typeface="Calibri" pitchFamily="34" charset="-120"/>
+              </a:rPr>
+              <a:t>601,802</a:t>
+            </a:r>
+            <a:endParaRPr lang="en-US" sz="1600" dirty="0"/>
+          </a:p>
+          <a:p>
+            <a:pPr algn="ctr" indent="0" marL="0">
+              <a:buNone/>
+            </a:pPr>
+            <a:r>
+              <a:rPr lang="en-US" sz="1100" dirty="0">
+                <a:solidFill>
+                  <a:srgbClr val="55545F"/>
+                </a:solidFill>
+                <a:latin typeface="Calibri" pitchFamily="34" charset="0"/>
+                <a:ea typeface="Calibri" pitchFamily="34" charset="-122"/>
+                <a:cs typeface="Calibri" pitchFamily="34" charset="-120"/>
+              </a:rPr>
+              <a:t>Escalated to the Stepping Committee</a:t>
+            </a:r>
+            <a:endParaRPr lang="en-US" sz="1600" dirty="0"/>
+          </a:p>
+        </p:txBody>
+      </p:sp>
+      <p:sp>
+        <p:nvSpPr>
+          <p:cNvPr id="24" name="Podium block 3"/>
+          <p:cNvSpPr/>
+          <p:nvPr/>
+        </p:nvSpPr>
+        <p:spPr>
+          <a:xfrm>
+            <a:off x="5120640" y="5623560"/>
+            <a:ext cx="1920240" cy="640080"/>
+          </a:xfrm>
+          <a:prstGeom prst="rect">
+            <a:avLst/>
+          </a:prstGeom>
+          <a:solidFill>
+            <a:srgbClr val="A8E6CF"/>
+          </a:solidFill>
+          <a:ln w="12700">
+            <a:solidFill>
+              <a:srgbClr val="A8E6CF"/>
+            </a:solidFill>
+            <a:prstDash val="solid"/>
+          </a:ln>
+        </p:spPr>
+      </p:sp>
+      <p:sp>
+        <p:nvSpPr>
+          <p:cNvPr id="25" name="Podium rank 3"/>
+          <p:cNvSpPr txBox="1"/>
+          <p:nvPr/>
+        </p:nvSpPr>
+        <p:spPr>
+          <a:xfrm>
+            <a:off x="5120640" y="5669280"/>
+            <a:ext cx="1920240" cy="548640"/>
+          </a:xfrm>
+          <a:prstGeom prst="rect">
+            <a:avLst/>
+          </a:prstGeom>
+          <a:noFill/>
+          <a:ln/>
+        </p:spPr>
+        <p:txBody>
+          <a:bodyPr wrap="square" lIns="0" tIns="0" rIns="0" bIns="0" rtlCol="0" anchor="t"/>
+          <a:lstStyle/>
+          <a:p>
+            <a:pPr algn="ctr" indent="0" marL="0">
+              <a:buNone/>
+            </a:pPr>
+            <a:r>
+              <a:rPr lang="en-US" sz="2800" b="1" dirty="0">
+                <a:solidFill>
+                  <a:srgbClr val="101014"/>
+                </a:solidFill>
+                <a:latin typeface="Arial" pitchFamily="34" charset="0"/>
+                <a:ea typeface="Arial" pitchFamily="34" charset="-122"/>
+                <a:cs typeface="Arial" pitchFamily="34" charset="-120"/>
+              </a:rPr>
+              <a:t>3</a:t>
+            </a:r>
+            <a:endParaRPr lang="en-US" sz="2800" dirty="0"/>
+          </a:p>
+        </p:txBody>
+      </p:sp>
+      <p:sp>
+        <p:nvSpPr>
+          <p:cNvPr id="26" name="Podium label 3"/>
+          <p:cNvSpPr txBox="1"/>
+          <p:nvPr/>
+        </p:nvSpPr>
+        <p:spPr>
+          <a:xfrm>
+            <a:off x="5120640" y="4754880"/>
+            <a:ext cx="1920240" cy="822960"/>
+          </a:xfrm>
+          <a:prstGeom prst="rect">
+            <a:avLst/>
+          </a:prstGeom>
+          <a:noFill/>
+          <a:ln/>
+        </p:spPr>
+        <p:txBody>
+          <a:bodyPr wrap="square" lIns="0" tIns="0" rIns="0" bIns="0" rtlCol="0" anchor="b"/>
+          <a:lstStyle/>
+          <a:p>
+            <a:pPr algn="ctr" indent="0" marL="0">
+              <a:buNone/>
+            </a:pPr>
+            <a:r>
+              <a:rPr lang="en-US" sz="1600" b="1" dirty="0">
+                <a:solidFill>
+                  <a:srgbClr val="101014"/>
+                </a:solidFill>
+                <a:latin typeface="Calibri" pitchFamily="34" charset="0"/>
+                <a:ea typeface="Calibri" pitchFamily="34" charset="-122"/>
+                <a:cs typeface="Calibri" pitchFamily="34" charset="-120"/>
+              </a:rPr>
+              <a:t>chloe egle</a:t>
+            </a:r>
+            <a:endParaRPr lang="en-US" sz="1600" dirty="0"/>
+          </a:p>
+          <a:p>
+            <a:pPr algn="ctr" indent="0" marL="0">
+              <a:buNone/>
+            </a:pPr>
+            <a:r>
+              <a:rPr lang="en-US" sz="1400" b="1" dirty="0">
+                <a:solidFill>
+                  <a:srgbClr val="55545F"/>
+                </a:solidFill>
+                <a:latin typeface="Calibri" pitchFamily="34" charset="0"/>
+                <a:ea typeface="Calibri" pitchFamily="34" charset="-122"/>
+                <a:cs typeface="Calibri" pitchFamily="34" charset="-120"/>
+              </a:rPr>
+              <a:t>576,906</a:t>
+            </a:r>
+            <a:endParaRPr lang="en-US" sz="1600" dirty="0"/>
+          </a:p>
+          <a:p>
+            <a:pPr algn="ctr" indent="0" marL="0">
+              <a:buNone/>
+            </a:pPr>
+            <a:r>
+              <a:rPr lang="en-US" sz="1100" dirty="0">
+                <a:solidFill>
+                  <a:srgbClr val="55545F"/>
+                </a:solidFill>
+                <a:latin typeface="Calibri" pitchFamily="34" charset="0"/>
+                <a:ea typeface="Calibri" pitchFamily="34" charset="-122"/>
+                <a:cs typeface="Calibri" pitchFamily="34" charset="-120"/>
+              </a:rPr>
+              <a:t>Escalated to the Stepping Committee</a:t>
+            </a:r>
+            <a:endParaRPr lang="en-US" sz="1600" dirty="0"/>
+          </a:p>
+        </p:txBody>
+      </p:sp>
+      <p:sp>
+        <p:nvSpPr>
+          <p:cNvPr id="27" name="Team steps panel"/>
+          <p:cNvSpPr/>
+          <p:nvPr/>
+        </p:nvSpPr>
+        <p:spPr>
+          <a:xfrm>
+            <a:off x="7589520" y="3429000"/>
+            <a:ext cx="4050792" cy="1783080"/>
+          </a:xfrm>
+          <a:prstGeom prst="roundRect">
+            <a:avLst>
+              <a:gd name="adj" fmla="val 12821"/>
+            </a:avLst>
+          </a:prstGeom>
+          <a:solidFill>
+            <a:srgbClr val="FFFFFF"/>
+          </a:solidFill>
+          <a:ln w="28575">
+            <a:solidFill>
+              <a:srgbClr val="1D1763"/>
+            </a:solidFill>
+            <a:prstDash val="solid"/>
+          </a:ln>
+        </p:spPr>
+      </p:sp>
+      <p:sp>
+        <p:nvSpPr>
+          <p:cNvPr id="28" name="Team steps heading"/>
+          <p:cNvSpPr txBox="1"/>
+          <p:nvPr/>
+        </p:nvSpPr>
+        <p:spPr>
+          <a:xfrm>
+            <a:off x="7818120" y="3493008"/>
+            <a:ext cx="3566160" cy="365760"/>
+          </a:xfrm>
+          <a:prstGeom prst="rect">
+            <a:avLst/>
+          </a:prstGeom>
+          <a:noFill/>
+          <a:ln/>
+        </p:spPr>
+        <p:txBody>
+          <a:bodyPr wrap="square" lIns="0" tIns="0" rIns="0" bIns="0" rtlCol="0" anchor="ctr"/>
+          <a:lstStyle/>
+          <a:p>
+            <a:pPr indent="0" marL="0">
+              <a:buNone/>
+            </a:pPr>
+            <a:r>
+              <a:rPr lang="en-US" sz="1800" b="1" dirty="0">
+                <a:solidFill>
+                  <a:srgbClr val="13813F"/>
+                </a:solidFill>
+                <a:latin typeface="Arial" pitchFamily="34" charset="0"/>
+                <a:ea typeface="Arial" pitchFamily="34" charset="-122"/>
+                <a:cs typeface="Arial" pitchFamily="34" charset="-120"/>
+              </a:rPr>
+              <a:t>👟 Team steps</a:t>
             </a:r>
             <a:endParaRPr lang="en-US" sz="1800" dirty="0"/>
           </a:p>
@@ -2031,13 +3205,13 @@
       </p:sp>
       <p:graphicFrame>
         <p:nvGraphicFramePr>
-          <p:cNvPr id="18" name="Chart 0" descr=""/>
+          <p:cNvPr id="29" name="Chart 0" descr=""/>
           <p:cNvGraphicFramePr/>
           <p:nvPr/>
         </p:nvGraphicFramePr>
         <p:xfrm>
-          <a:off x="685800" y="3566160"/>
-          <a:ext cx="5212080" cy="1645920"/>
+          <a:off x="7726680" y="3840480"/>
+          <a:ext cx="3794760" cy="1325880"/>
         </p:xfrm>
         <a:graphic xmlns:a="http://schemas.openxmlformats.org/drawingml/2006/main">
           <a:graphicData uri="http://schemas.openxmlformats.org/drawingml/2006/chart">
@@ -2047,293 +3221,18 @@
       </p:graphicFrame>
       <p:sp>
         <p:nvSpPr>
-          <p:cNvPr id="19" name="Most raised card"/>
+          <p:cNvPr id="30" name="Top fundraiser card"/>
           <p:cNvSpPr/>
           <p:nvPr/>
         </p:nvSpPr>
         <p:spPr>
           <a:xfrm>
-            <a:off x="6217920" y="2926080"/>
-            <a:ext cx="5486400" cy="2331720"/>
+            <a:off x="7589520" y="5349240"/>
+            <a:ext cx="4050792" cy="1097280"/>
           </a:xfrm>
           <a:prstGeom prst="roundRect">
             <a:avLst>
-              <a:gd name="adj" fmla="val 7843"/>
-            </a:avLst>
-          </a:prstGeom>
-          <a:solidFill>
-            <a:schemeClr val="bg1"/>
-          </a:solidFill>
-          <a:ln w="12700">
-            <a:solidFill>
-              <a:schemeClr val="bg1"/>
-            </a:solidFill>
-            <a:prstDash val="solid"/>
-          </a:ln>
-        </p:spPr>
-      </p:sp>
-      <p:sp>
-        <p:nvSpPr>
-          <p:cNvPr id="20" name="Text 17"/>
-          <p:cNvSpPr txBox="1"/>
-          <p:nvPr/>
-        </p:nvSpPr>
-        <p:spPr>
-          <a:xfrm>
-            <a:off x="6446520" y="2999232"/>
-            <a:ext cx="5029200" cy="548640"/>
-          </a:xfrm>
-          <a:prstGeom prst="rect">
-            <a:avLst/>
-          </a:prstGeom>
-          <a:noFill/>
-          <a:ln/>
-        </p:spPr>
-        <p:txBody>
-          <a:bodyPr wrap="square" lIns="0" tIns="0" rIns="0" bIns="0" rtlCol="0" anchor="t"/>
-          <a:lstStyle/>
-          <a:p>
-            <a:pPr indent="0" marL="0">
-              <a:buNone/>
-            </a:pPr>
-            <a:r>
-              <a:rPr lang="en-US" sz="1800" b="1" dirty="0">
-                <a:solidFill>
-                  <a:schemeClr val="tx1"/>
-                </a:solidFill>
-              </a:rPr>
-              <a:t>Most raised</a:t>
-            </a:r>
-            <a:endParaRPr lang="en-US" sz="1800" dirty="0"/>
-          </a:p>
-          <a:p>
-            <a:pPr indent="0" marL="0">
-              <a:buNone/>
-            </a:pPr>
-            <a:r>
-              <a:rPr lang="en-US" sz="1200" dirty="0">
-                <a:solidFill>
-                  <a:srgbClr val="55545F"/>
-                </a:solidFill>
-              </a:rPr>
-              <a:t>Team fundraising pages (AUD)</a:t>
-            </a:r>
-            <a:endParaRPr lang="en-US" sz="1800" dirty="0"/>
-          </a:p>
-        </p:txBody>
-      </p:sp>
-      <p:graphicFrame>
-        <p:nvGraphicFramePr>
-          <p:cNvPr id="21" name="Chart 1" descr=""/>
-          <p:cNvGraphicFramePr/>
-          <p:nvPr/>
-        </p:nvGraphicFramePr>
-        <p:xfrm>
-          <a:off x="6355080" y="3566160"/>
-          <a:ext cx="5212080" cy="1645920"/>
-        </p:xfrm>
-        <a:graphic xmlns:a="http://schemas.openxmlformats.org/drawingml/2006/main">
-          <a:graphicData uri="http://schemas.openxmlformats.org/drawingml/2006/chart">
-            <c:chart xmlns:c="http://schemas.openxmlformats.org/drawingml/2006/chart" r:id="rId2"/>
-          </a:graphicData>
-        </a:graphic>
-      </p:graphicFrame>
-      <p:sp>
-        <p:nvSpPr>
-          <p:cNvPr id="22" name="Award 1"/>
-          <p:cNvSpPr/>
-          <p:nvPr/>
-        </p:nvSpPr>
-        <p:spPr>
-          <a:xfrm>
-            <a:off x="548640" y="5440680"/>
-            <a:ext cx="3593592" cy="1188720"/>
-          </a:xfrm>
-          <a:prstGeom prst="roundRect">
-            <a:avLst>
-              <a:gd name="adj" fmla="val 13846"/>
-            </a:avLst>
-          </a:prstGeom>
-          <a:solidFill>
-            <a:srgbClr val="F7B955"/>
-          </a:solidFill>
-          <a:ln w="12700">
-            <a:solidFill>
-              <a:srgbClr val="F7B955"/>
-            </a:solidFill>
-            <a:prstDash val="solid"/>
-          </a:ln>
-        </p:spPr>
-      </p:sp>
-      <p:sp>
-        <p:nvSpPr>
-          <p:cNvPr id="23" name="Text 19"/>
-          <p:cNvSpPr txBox="1"/>
-          <p:nvPr/>
-        </p:nvSpPr>
-        <p:spPr>
-          <a:xfrm>
-            <a:off x="731520" y="5486400"/>
-            <a:ext cx="3227832" cy="1097280"/>
-          </a:xfrm>
-          <a:prstGeom prst="rect">
-            <a:avLst/>
-          </a:prstGeom>
-          <a:noFill/>
-          <a:ln/>
-        </p:spPr>
-        <p:txBody>
-          <a:bodyPr wrap="square" lIns="0" tIns="0" rIns="0" bIns="0" rtlCol="0" anchor="ctr"/>
-          <a:lstStyle/>
-          <a:p>
-            <a:pPr indent="0" marL="0">
-              <a:buNone/>
-            </a:pPr>
-            <a:r>
-              <a:rPr lang="en-US" sz="1200" b="1" dirty="0">
-                <a:solidFill>
-                  <a:srgbClr val="101014"/>
-                </a:solidFill>
-              </a:rPr>
-              <a:t>STEP CHAMPION</a:t>
-            </a:r>
-            <a:endParaRPr lang="en-US" sz="1200" dirty="0"/>
-          </a:p>
-          <a:p>
-            <a:pPr indent="0" marL="0">
-              <a:buNone/>
-            </a:pPr>
-            <a:r>
-              <a:rPr lang="en-US" sz="1800" b="1" dirty="0">
-                <a:solidFill>
-                  <a:srgbClr val="101014"/>
-                </a:solidFill>
-              </a:rPr>
-              <a:t>ben walker  ·  601,802 steps</a:t>
-            </a:r>
-            <a:endParaRPr lang="en-US" sz="1200" dirty="0"/>
-          </a:p>
-          <a:p>
-            <a:pPr indent="0" marL="0">
-              <a:buNone/>
-            </a:pPr>
-            <a:r>
-              <a:rPr lang="en-US" sz="1200" dirty="0">
-                <a:solidFill>
-                  <a:srgbClr val="101014"/>
-                </a:solidFill>
-              </a:rPr>
-              <a:t>Escalated to the Stepping Committee</a:t>
-            </a:r>
-            <a:endParaRPr lang="en-US" sz="1200" dirty="0"/>
-          </a:p>
-        </p:txBody>
-      </p:sp>
-      <p:sp>
-        <p:nvSpPr>
-          <p:cNvPr id="24" name="Award 2"/>
-          <p:cNvSpPr/>
-          <p:nvPr/>
-        </p:nvSpPr>
-        <p:spPr>
-          <a:xfrm>
-            <a:off x="4325112" y="5440680"/>
-            <a:ext cx="3593592" cy="1188720"/>
-          </a:xfrm>
-          <a:prstGeom prst="roundRect">
-            <a:avLst>
-              <a:gd name="adj" fmla="val 13846"/>
-            </a:avLst>
-          </a:prstGeom>
-          <a:solidFill>
-            <a:srgbClr val="C9C2F3"/>
-          </a:solidFill>
-          <a:ln w="12700">
-            <a:solidFill>
-              <a:srgbClr val="C9C2F3"/>
-            </a:solidFill>
-            <a:prstDash val="solid"/>
-          </a:ln>
-        </p:spPr>
-      </p:sp>
-      <p:sp>
-        <p:nvSpPr>
-          <p:cNvPr id="25" name="Text 21"/>
-          <p:cNvSpPr txBox="1"/>
-          <p:nvPr/>
-        </p:nvSpPr>
-        <p:spPr>
-          <a:xfrm>
-            <a:off x="4507992" y="5486400"/>
-            <a:ext cx="3227832" cy="1097280"/>
-          </a:xfrm>
-          <a:prstGeom prst="rect">
-            <a:avLst/>
-          </a:prstGeom>
-          <a:noFill/>
-          <a:ln/>
-        </p:spPr>
-        <p:txBody>
-          <a:bodyPr wrap="square" lIns="0" tIns="0" rIns="0" bIns="0" rtlCol="0" anchor="ctr"/>
-          <a:lstStyle/>
-          <a:p>
-            <a:pPr indent="0" marL="0">
-              <a:buNone/>
-            </a:pPr>
-            <a:r>
-              <a:rPr lang="en-US" sz="1200" b="1" dirty="0">
-                <a:solidFill>
-                  <a:srgbClr val="101014"/>
-                </a:solidFill>
-              </a:rPr>
-              <a:t>FEWEST STEPS</a:t>
-            </a:r>
-            <a:endParaRPr lang="en-US" sz="1200" dirty="0"/>
-          </a:p>
-          <a:p>
-            <a:pPr indent="0" marL="0">
-              <a:buNone/>
-            </a:pPr>
-            <a:r>
-              <a:rPr lang="en-US" sz="1800" b="1" dirty="0">
-                <a:solidFill>
-                  <a:srgbClr val="101014"/>
-                </a:solidFill>
-              </a:rPr>
-              <a:t>Brock Evans  ·  347,451 steps</a:t>
-            </a:r>
-            <a:endParaRPr lang="en-US" sz="1200" dirty="0"/>
-          </a:p>
-          <a:p>
-            <a:pPr indent="0" marL="0">
-              <a:buNone/>
-            </a:pPr>
-            <a:r>
-              <a:rPr lang="en-US" sz="1200" dirty="0">
-                <a:solidFill>
-                  <a:srgbClr val="101014"/>
-                </a:solidFill>
-              </a:rPr>
-              <a:t>Finding Our Footing</a:t>
-            </a:r>
-            <a:endParaRPr lang="en-US" sz="1200" dirty="0"/>
-          </a:p>
-        </p:txBody>
-      </p:sp>
-      <p:sp>
-        <p:nvSpPr>
-          <p:cNvPr id="26" name="Award 3"/>
-          <p:cNvSpPr/>
-          <p:nvPr/>
-        </p:nvSpPr>
-        <p:spPr>
-          <a:xfrm>
-            <a:off x="8101584" y="5440680"/>
-            <a:ext cx="3593592" cy="1188720"/>
-          </a:xfrm>
-          <a:prstGeom prst="roundRect">
-            <a:avLst>
-              <a:gd name="adj" fmla="val 13846"/>
+              <a:gd name="adj" fmla="val 20833"/>
             </a:avLst>
           </a:prstGeom>
           <a:solidFill>
@@ -2349,14 +3248,14 @@
       </p:sp>
       <p:sp>
         <p:nvSpPr>
-          <p:cNvPr id="27" name="Text 23"/>
+          <p:cNvPr id="31" name="Top fundraiser text"/>
           <p:cNvSpPr txBox="1"/>
           <p:nvPr/>
         </p:nvSpPr>
         <p:spPr>
           <a:xfrm>
-            <a:off x="8284464" y="5486400"/>
-            <a:ext cx="3227832" cy="1097280"/>
+            <a:off x="7818120" y="5394960"/>
+            <a:ext cx="3611880" cy="1005840"/>
           </a:xfrm>
           <a:prstGeom prst="rect">
             <a:avLst/>
@@ -2376,8 +3275,11 @@
                 <a:solidFill>
                   <a:srgbClr val="101014"/>
                 </a:solidFill>
-              </a:rPr>
-              <a:t>TOP FUNDRAISER</a:t>
+                <a:latin typeface="Calibri" pitchFamily="34" charset="0"/>
+                <a:ea typeface="Calibri" pitchFamily="34" charset="-122"/>
+                <a:cs typeface="Calibri" pitchFamily="34" charset="-120"/>
+              </a:rPr>
+              <a:t>💰 TOP FUNDRAISER</a:t>
             </a:r>
             <a:endParaRPr lang="en-US" sz="1200" dirty="0"/>
           </a:p>
@@ -2386,12 +3288,15 @@
               <a:buNone/>
             </a:pPr>
             <a:r>
-              <a:rPr lang="en-US" sz="1800" b="1" dirty="0">
+              <a:rPr lang="en-US" sz="2400" b="1" dirty="0">
                 <a:solidFill>
                   <a:srgbClr val="101014"/>
                 </a:solidFill>
-              </a:rPr>
-              <a:t>Emma Coggin  ·  $470 raised</a:t>
+                <a:latin typeface="Calibri" pitchFamily="34" charset="0"/>
+                <a:ea typeface="Calibri" pitchFamily="34" charset="-122"/>
+                <a:cs typeface="Calibri" pitchFamily="34" charset="-120"/>
+              </a:rPr>
+              <a:t>Emma Coggin</a:t>
             </a:r>
             <a:endParaRPr lang="en-US" sz="1200" dirty="0"/>
           </a:p>
@@ -2404,8 +3309,11 @@
                 <a:solidFill>
                   <a:srgbClr val="101014"/>
                 </a:solidFill>
-              </a:rPr>
-              <a:t>Escalated to the Stepping Committee</a:t>
+                <a:latin typeface="Calibri" pitchFamily="34" charset="0"/>
+                <a:ea typeface="Calibri" pitchFamily="34" charset="-122"/>
+                <a:cs typeface="Calibri" pitchFamily="34" charset="-120"/>
+              </a:rPr>
+              <a:t>$470 raised · Escalated to the Stepping Committee</a:t>
             </a:r>
             <a:endParaRPr lang="en-US" sz="1200" dirty="0"/>
           </a:p>
@@ -2420,49 +3328,49 @@
 </file>
 
 <file path=ppt/theme/theme1.xml><?xml version="1.0" encoding="utf-8"?>
-<a:theme xmlns:a="http://schemas.openxmlformats.org/drawingml/2006/main" name="TDC Steptember">
+<a:theme xmlns:a="http://schemas.openxmlformats.org/drawingml/2006/main" name="Office Theme">
   <a:themeElements>
-    <a:clrScheme name="TDC Steptember">
+    <a:clrScheme name="Office">
       <a:dk1>
-        <a:srgbClr val="101014"/>
+        <a:sysClr val="windowText" lastClr="000000"/>
       </a:dk1>
       <a:lt1>
-        <a:srgbClr val="FFFFFF"/>
+        <a:sysClr val="window" lastClr="FFFFFF"/>
       </a:lt1>
       <a:dk2>
-        <a:srgbClr val="2B2170"/>
+        <a:srgbClr val="44546A"/>
       </a:dk2>
       <a:lt2>
-        <a:srgbClr val="F3F2EE"/>
+        <a:srgbClr val="E7E6E6"/>
       </a:lt2>
       <a:accent1>
-        <a:srgbClr val="2A78D6"/>
+        <a:srgbClr val="4472C4"/>
       </a:accent1>
       <a:accent2>
-        <a:srgbClr val="EB6834"/>
+        <a:srgbClr val="ED7D31"/>
       </a:accent2>
       <a:accent3>
-        <a:srgbClr val="1BAF7A"/>
+        <a:srgbClr val="A5A5A5"/>
       </a:accent3>
       <a:accent4>
-        <a:srgbClr val="6A55E0"/>
+        <a:srgbClr val="FFC000"/>
       </a:accent4>
       <a:accent5>
-        <a:srgbClr val="F7B955"/>
+        <a:srgbClr val="5B9BD5"/>
       </a:accent5>
       <a:accent6>
-        <a:srgbClr val="C9C2F3"/>
+        <a:srgbClr val="70AD47"/>
       </a:accent6>
       <a:hlink>
-        <a:srgbClr val="6A55E0"/>
+        <a:srgbClr val="0563C1"/>
       </a:hlink>
       <a:folHlink>
-        <a:srgbClr val="5B46D6"/>
+        <a:srgbClr val="954F72"/>
       </a:folHlink>
     </a:clrScheme>
-    <a:fontScheme name="TDC Steptember">
+    <a:fontScheme name="Office">
       <a:majorFont>
-        <a:latin typeface="Arial"/>
+        <a:latin typeface="Calibri Light" panose="020F0302020204030204"/>
         <a:ea typeface=""/>
         <a:cs typeface=""/>
         <a:font script="Jpan" typeface="游ゴシック Light"/>
@@ -2514,7 +3422,7 @@
         <a:font script="Tfng" typeface="Ebrima"/>
       </a:majorFont>
       <a:minorFont>
-        <a:latin typeface="Calibri"/>
+        <a:latin typeface="Calibri" panose="020F0502020204030204"/>
         <a:ea typeface=""/>
         <a:cs typeface=""/>
         <a:font script="Jpan" typeface="游ゴシック"/>

--- a/steptember-showdown.pptx
+++ b/steptember-showdown.pptx
@@ -1809,7 +1809,7 @@
         <p:spPr>
           <a:xfrm>
             <a:off x="790956" y="4114800"/>
-            <a:ext cx="2926080" cy="1927555"/>
+            <a:ext cx="2926080" cy="1950415"/>
           </a:xfrm>
           <a:prstGeom prst="rect">
             <a:avLst/>
@@ -1833,7 +1833,7 @@
         <p:spPr>
           <a:xfrm>
             <a:off x="4631436" y="4114800"/>
-            <a:ext cx="2926080" cy="1938528"/>
+            <a:ext cx="2926080" cy="1950415"/>
           </a:xfrm>
           <a:prstGeom prst="rect">
             <a:avLst/>
